--- a/protected-downloads/praesentation/TL09.pptx
+++ b/protected-downloads/praesentation/TL09.pptx
@@ -4782,7 +4782,7 @@
                 </a:solidFill>
                 <a:latin typeface="Arial"/>
               </a:rPr>
-              <a:t>v0.2</a:t>
+              <a:t>v1.0</a:t>
             </a:r>
           </a:p>
         </p:txBody>

--- a/protected-downloads/praesentation/TL09.pptx
+++ b/protected-downloads/praesentation/TL09.pptx
@@ -592,91 +592,6 @@
           <a:lstStyle/>
           <a:p>
             <a:r>
-              <a:t>Transferaufgabe auf Moderationskarte schreiben – TN nehmen sie mit.</a:t>
-            </a:r>
-          </a:p>
-          <a:p>
-            <a:r>
-              <a:t>Jeden TN einen konkreten ersten Schritt mit Datum benennen lassen.</a:t>
-            </a:r>
-          </a:p>
-          <a:p>
-            <a:r>
-              <a:t>Selbstcheck (Sec 5): in Stille ausfüllen, ca. 3 Min.</a:t>
-            </a:r>
-          </a:p>
-          <a:p>
-            <a:r>
-              <a:t>Brücke TL10: Wer Veränderung auf Teamebene gestalten kann, ist bereit für Führen in Unsicherheit auf Organisationsebene.</a:t>
-            </a:r>
-          </a:p>
-        </p:txBody>
-      </p:sp>
-      <p:sp>
-        <p:nvSpPr>
-          <p:cNvPr id="4" name="Slide Number Placeholder 3"/>
-          <p:cNvSpPr>
-            <a:spLocks noGrp="1"/>
-          </p:cNvSpPr>
-          <p:nvPr>
-            <p:ph type="sldNum" idx="5" sz="quarter"/>
-          </p:nvPr>
-        </p:nvSpPr>
-        <p:spPr/>
-      </p:sp>
-    </p:spTree>
-  </p:cSld>
-  <p:clrMapOvr>
-    <a:masterClrMapping/>
-  </p:clrMapOvr>
-</p:notes>
-</file>
-
-<file path=ppt/notesSlides/notesSlide11.xml><?xml version="1.0" encoding="utf-8"?>
-<p:notes xmlns:a="http://schemas.openxmlformats.org/drawingml/2006/main" xmlns:p="http://schemas.openxmlformats.org/presentationml/2006/main" xmlns:r="http://schemas.openxmlformats.org/officeDocument/2006/relationships">
-  <p:cSld>
-    <p:spTree>
-      <p:nvGrpSpPr>
-        <p:cNvPr id="1" name=""/>
-        <p:cNvGrpSpPr/>
-        <p:nvPr/>
-      </p:nvGrpSpPr>
-      <p:grpSpPr>
-        <a:xfrm>
-          <a:off x="0" y="0"/>
-          <a:ext cx="0" cy="0"/>
-          <a:chOff x="0" y="0"/>
-          <a:chExt cx="0" cy="0"/>
-        </a:xfrm>
-      </p:grpSpPr>
-      <p:sp>
-        <p:nvSpPr>
-          <p:cNvPr id="2" name="Slide Image Placeholder 1"/>
-          <p:cNvSpPr>
-            <a:spLocks noGrp="1"/>
-          </p:cNvSpPr>
-          <p:nvPr>
-            <p:ph type="sldImg" idx="2"/>
-          </p:nvPr>
-        </p:nvSpPr>
-        <p:spPr/>
-      </p:sp>
-      <p:sp>
-        <p:nvSpPr>
-          <p:cNvPr id="3" name="Notes Placeholder 2"/>
-          <p:cNvSpPr>
-            <a:spLocks noGrp="1"/>
-          </p:cNvSpPr>
-          <p:nvPr>
-            <p:ph type="body" idx="3" sz="quarter"/>
-          </p:nvPr>
-        </p:nvSpPr>
-        <p:spPr/>
-        <p:txBody>
-          <a:bodyPr/>
-          <a:lstStyle/>
-          <a:p>
-            <a:r>
               <a:t>Abschlussrunde (1 Satz pro TN): Was nehme ich mit?</a:t>
             </a:r>
           </a:p>
@@ -762,7 +677,12 @@
           <a:lstStyle/>
           <a:p>
             <a:r>
-              <a:t>Siehe Trainerhandbuch (Sektion 3) für Moderationshinweise, Timing und erwartete Teilnehmerreaktionen.</a:t>
+              <a:t>Einstiegsfrage an Plenum (09:10–09:30): Denken Sie an eine Veränderung, die nicht so gelaufen ist wie geplant – was war der entscheidende Fehler? Antworten auf Flipchart clustern: Kommunikation / Beteiligung / innere Transition.</a:t>
+            </a:r>
+          </a:p>
+          <a:p>
+            <a:r>
+              <a:t>Überleitung: Diese drei Kategorien adressieren genau die drei Modelle des Tages.</a:t>
             </a:r>
           </a:p>
         </p:txBody>
@@ -832,12 +752,17 @@
           <a:lstStyle/>
           <a:p>
             <a:r>
-              <a:t>Einstiegsfrage an Plenum (09:10–09:30): Denken Sie an eine Veränderung, die nicht so gelaufen ist wie geplant – was war der entscheidende Fehler? Antworten auf Flipchart clustern: Kommunikation / Beteiligung / innere Transition.</a:t>
-            </a:r>
-          </a:p>
-          <a:p>
-            <a:r>
-              <a:t>Überleitung: Diese drei Kategorien adressieren genau die drei Modelle des Tages.</a:t>
+              <a:t>Stufen 5 und 7 bewusst weggelassen – die sechs dargestellten haben den größten Praxisbezug für FK-Teams.</a:t>
+            </a:r>
+          </a:p>
+          <a:p>
+            <a:r>
+              <a:t>Frage nach AB-1 Schritt 2: Wenn Sie eine Rangliste machen müssten – welche Stufe hat die höchsten Kosten, wenn sie fehlt? Prioritätssetzung statt Vollständigkeit üben.</a:t>
+            </a:r>
+          </a:p>
+          <a:p>
+            <a:r>
+              <a:t>Überleitung zu Bridges: Kotter erklärt, was fehlt – Bridges erklärt, warum es fehlt.</a:t>
             </a:r>
           </a:p>
         </p:txBody>
@@ -907,17 +832,17 @@
           <a:lstStyle/>
           <a:p>
             <a:r>
-              <a:t>Stufen 5 und 7 bewusst weggelassen – die sechs dargestellten haben den größten Praxisbezug für FK-Teams.</a:t>
-            </a:r>
-          </a:p>
-          <a:p>
-            <a:r>
-              <a:t>Frage nach AB-1 Schritt 2: Wenn Sie eine Rangliste machen müssten – welche Stufe hat die höchsten Kosten, wenn sie fehlt? Prioritätssetzung statt Vollständigkeit üben.</a:t>
-            </a:r>
-          </a:p>
-          <a:p>
-            <a:r>
-              <a:t>Überleitung zu Bridges: Kotter erklärt, was fehlt – Bridges erklärt, warum es fehlt.</a:t>
+              <a:t>Konkrete Frage an TN: Wer ist in Ihrem Team aktuell noch in der Endungs-Phase – und haben Sie das schon ausgesprochen?</a:t>
+            </a:r>
+          </a:p>
+          <a:p>
+            <a:r>
+              <a:t>TN sollen im Kopf konkrete Namen aus ihrem Team nennen – abstraktes Modelldenken verhindert die Dreyfus-Stufe-4-Leistung.</a:t>
+            </a:r>
+          </a:p>
+          <a:p>
+            <a:r>
+              <a:t>Grenze von Bridges benennen: erklärt individuelle Transition, wenig Orientierung für Teamdynamik.</a:t>
             </a:r>
           </a:p>
         </p:txBody>
@@ -987,17 +912,22 @@
           <a:lstStyle/>
           <a:p>
             <a:r>
-              <a:t>Konkrete Frage an TN: Wer ist in Ihrem Team aktuell noch in der Endungs-Phase – und haben Sie das schon ausgesprochen?</a:t>
-            </a:r>
-          </a:p>
-          <a:p>
-            <a:r>
-              <a:t>TN sollen im Kopf konkrete Namen aus ihrem Team nennen – abstraktes Modelldenken verhindert die Dreyfus-Stufe-4-Leistung.</a:t>
-            </a:r>
-          </a:p>
-          <a:p>
-            <a:r>
-              <a:t>Grenze von Bridges benennen: erklärt individuelle Transition, wenig Orientierung für Teamdynamik.</a:t>
+              <a:t>Moderationskarten-Übung (anonym): gelb = legitimer Einwand, rot = verdeckte Angst. Trainer gibt zuerst ein Beispiel, bevor TN schreiben.</a:t>
+            </a:r>
+          </a:p>
+          <a:p>
+            <a:r>
+              <a:t>Wenn überwiegend rote Karten: explizit benennen – das ist eine Information über die Führungskultur, nicht über die Veränderung.</a:t>
+            </a:r>
+          </a:p>
+          <a:p>
+            <a:r>
+              <a:t>Widerstand im Seminarraum selbst (Change-Müdigkeit, Zynismus) direkt als Lehrstoff nutzen.</a:t>
+            </a:r>
+          </a:p>
+          <a:p>
+            <a:r>
+              <a:t>Moderation (HB Sec 3): Regieanweisung: Die Moderationskarten-Übung funktioniert nur, wenn der Trainer Anonymität garantiert. Karten nicht vorlesen, wenn TN zögern – zunächst selbst ein Beispiel geben (z. B.: „Gelbe Karte – legitimer Einwand: ‚Das Konzept passt nicht zu unserem Kundenstamm, wir haben 70 % Handwerker, keine Maschinenbauunternehmen.'"). Das entspannt die Gruppe. Moderationshinweis – Karten überwiegend rot (verdeckte Angst): Wenn die große Mehrheit der Karten der roten Kategorie zugeordnet wird, ist das selbst eine Information über die Führungskultur der Teilnehmer. Explizit benennen: „Das ist ein interessantes Muster – die meisten Beispiele beschreiben Angst, nicht sachliche Information. Das kann heißen, dass in Ihren Teams Einwände systemisch als Schwäche erlebt werden – und das ist selbst eine Führungsaufgabe." Anschließende Frage: „Was müsste sich in Ihrem Team ändern, damit ein Berater seinen Einwand als gelbe Karte formulieren kann?" So wird die Übung zum Spiegel der eigenen Führungskultur. Moderationshinweis – erkennbarer Personenbezug: Wenn eine anonyme Karte so konkret ist, dass die Gruppe (die sich kennt) eine bestimmte Person oder Situation erkennt: Karte nicht vorlesen, kommentarlos zur Seite legen und die Sache danach kurz mit dem betreffenden TN klären. Vertraulichkeit ist auch bei anonymen Karten nicht verhandelbar. Moderationshinweis: Widerstand, der im Seminarraum selbst auftritt (TN äußern Skepsis gegenüber den Modellen), ist didaktisch nutzbar: „Was Sie gerade sagen, ist genau das, was Widerstand im Team bedeutet. Was würde ich tun, wenn ich Ihr Teamleiter wäre?" – nicht als Konfrontation, sondern als Einladung zur Reflexion.</a:t>
             </a:r>
           </a:p>
         </p:txBody>
@@ -1067,22 +997,17 @@
           <a:lstStyle/>
           <a:p>
             <a:r>
-              <a:t>Moderationskarten-Übung (anonym): gelb = legitimer Einwand, rot = verdeckte Angst. Trainer gibt zuerst ein Beispiel, bevor TN schreiben.</a:t>
-            </a:r>
-          </a:p>
-          <a:p>
-            <a:r>
-              <a:t>Wenn überwiegend rote Karten: explizit benennen – das ist eine Information über die Führungskultur, nicht über die Veränderung.</a:t>
-            </a:r>
-          </a:p>
-          <a:p>
-            <a:r>
-              <a:t>Widerstand im Seminarraum selbst (Change-Müdigkeit, Zynismus) direkt als Lehrstoff nutzen.</a:t>
-            </a:r>
-          </a:p>
-          <a:p>
-            <a:r>
-              <a:t>Moderation (HB Sec 3): Regieanweisung: Die Moderationskarten-Übung funktioniert nur, wenn der Trainer Anonymität garantiert. Karten nicht vorlesen, wenn TN zögern – zunächst selbst ein Beispiel geben (z. B.: „Gelbe Karte – legitimer Einwand: ‚Das Konzept passt nicht zu unserem Kundenstamm, wir haben 70 % Handwerker, keine Maschinenbauunternehmen.'"). Das entspannt die Gruppe. Moderationshinweis – Karten überwiegend rot (verdeckte Angst): Wenn die große Mehrheit der Karten der roten Kategorie zugeordnet wird, ist das selbst eine Information über die Führungskultur der Teilnehmer. Explizit benennen: „Das ist ein interessantes Muster – die meisten Beispiele beschreiben Angst, nicht sachliche Information. Das kann heißen, dass in Ihren Teams Einwände systemisch als Schwäche erlebt werden – und das ist selbst eine Führungsaufgabe." Anschließende Frage: „Was müsste sich in Ihrem Team ändern, damit ein Berater seinen Einwand als gelbe Karte formulieren kann?" So wird die Übung zum Spiegel der eigenen Führungskultur. Moderationshinweis – erkennbarer Personenbezug: Wenn eine anonyme Karte so konkret ist, dass die Gruppe (die sich kennt) eine bestimmte Person oder Situation erkennt: Karte nicht vorlesen, kommentarlos zur Seite legen und die Sache danach kurz mit dem betreffenden TN klären. Vertraulichkeit ist auch bei anonymen Karten nicht verhandelbar. Moderationshinweis: Widerstand, der im Seminarraum selbst auftritt (TN äußern Skepsis gegenüber den Modellen), ist didaktisch nutzbar: „Was Sie gerade sagen, ist genau das, was Widerstand im Team bedeutet. Was würde ich tun, wenn ich Ihr Teamleiter wäre?" – nicht als Konfrontation, sondern als Einladung zur Reflexion.</a:t>
+              <a:t>Watzlawick: Man kann nicht nicht kommunizieren. Schweigen kommuniziert immer – meist das Falsche.</a:t>
+            </a:r>
+          </a:p>
+          <a:p>
+            <a:r>
+              <a:t>Häufigster Führungsfehler: das Was wird erklärt, das Warum als selbstverständlich vorausgesetzt.</a:t>
+            </a:r>
+          </a:p>
+          <a:p>
+            <a:r>
+              <a:t>Mezirow: Veränderung erfordert neue Deutungsrahmen – die entstehen durch Dialog, nicht durch Information.</a:t>
             </a:r>
           </a:p>
         </p:txBody>
@@ -1152,17 +1077,17 @@
           <a:lstStyle/>
           <a:p>
             <a:r>
-              <a:t>Watzlawick: Man kann nicht nicht kommunizieren. Schweigen kommuniziert immer – meist das Falsche.</a:t>
-            </a:r>
-          </a:p>
-          <a:p>
-            <a:r>
-              <a:t>Häufigster Führungsfehler: das Was wird erklärt, das Warum als selbstverständlich vorausgesetzt.</a:t>
-            </a:r>
-          </a:p>
-          <a:p>
-            <a:r>
-              <a:t>Mezirow: Veränderung erfordert neue Deutungsrahmen – die entstehen durch Dialog, nicht durch Information.</a:t>
+              <a:t>Greenleaf-Test für Veränderung: Verlässt der Berater das Gespräch mit mehr Orientierung – oder mit weniger?</a:t>
+            </a:r>
+          </a:p>
+          <a:p>
+            <a:r>
+              <a:t>Bass &amp; Avolio: Inspirational Motivation + Individualized Consideration sind strukturelle Voraussetzungen für gelingende Veränderung.</a:t>
+            </a:r>
+          </a:p>
+          <a:p>
+            <a:r>
+              <a:t>Spannungsverhältnis benennen: Servant Leadership im Verbund – wenn die Veränderung nicht von mir gewählt wurde, sondern von Vorstand oder Atruvia. Wie bleibe ich glaubwürdig?</a:t>
             </a:r>
           </a:p>
         </p:txBody>
@@ -1232,17 +1157,32 @@
           <a:lstStyle/>
           <a:p>
             <a:r>
-              <a:t>Greenleaf-Test für Veränderung: Verlässt der Berater das Gespräch mit mehr Orientierung – oder mit weniger?</a:t>
-            </a:r>
-          </a:p>
-          <a:p>
-            <a:r>
-              <a:t>Bass &amp; Avolio: Inspirational Motivation + Individualized Consideration sind strukturelle Voraussetzungen für gelingende Veränderung.</a:t>
-            </a:r>
-          </a:p>
-          <a:p>
-            <a:r>
-              <a:t>Spannungsverhältnis benennen: Servant Leadership im Verbund – wenn die Veränderung nicht von mir gewählt wurde, sondern von Vorstand oder Atruvia. Wie bleibe ich glaubwürdig?</a:t>
+              <a:t>Mindesttiefe klar machen: Kein Datum in Teil C = kein substanzielle Fallberatung. TN nach 15 Min. prüfen: Steht da ein Datum oder nur eine Phase?</a:t>
+            </a:r>
+          </a:p>
+          <a:p>
+            <a:r>
+              <a:t>Gruppen vorab einteilen – keine Selbstwahl (Grüppchenbildung vermeiden).</a:t>
+            </a:r>
+          </a:p>
+          <a:p>
+            <a:r>
+              <a:t>Fallberatungs-Takt: 4 Min. Präsentation, je 2 Min. Rückmeldung (Was überzeugt? Welche Frage fehlt? Was fehlt im Plan?).</a:t>
+            </a:r>
+          </a:p>
+          <a:p>
+            <a:r>
+              <a:t>Falls TN Situation zu vertraulich empfindet: Thomas/Team-Mitte als Projektionsfläche anbieten, Erkenntnisse mental übertragen.</a:t>
+            </a:r>
+          </a:p>
+          <a:p>
+            <a:r>
+              <a:t>Plenumssicherung (5 Min.): Welcher Fallberatungshinweis war am wertvollsten – und warum?</a:t>
+            </a:r>
+          </a:p>
+          <a:p>
+            <a:r>
+              <a:t>Moderation (HB Sec 3): Regieanweisung: Die drei Modelle nicht als gleichwertig behandeln. Lewin ist die kürzeste Einheit (Grundstruktur), Kotter die operativste (Checkliste), Bridges die emotional tiefste und für FK-Teamleiter in der Regel am stärksten überraschend. Den meisten Raum auf Bridges legen – Endings ist das, was in der Praxis am häufigsten übersprungen wird. Moderationshinweis Kotter-Analyse: Wenn TN AB-1 Schritt 2 bearbeiten und alle acht Stufen als defizitär markieren, ist das ein Signal, dass sie das Modell noch nicht als diagnostisches Werkzeug nutzen, sondern als Schulaufgabe. Nachfragen: „Wenn Sie eine Rangliste der Defizite machen müssten – welche Stufe hat die höchsten Kosten, wenn sie fehlt?" Ziel: Prioritätensetzung statt Vollständigkeitssicherung. Moderationshinweis Bridges: TN sollen konkrete Namen aus dem Praxisfall Thomas / Team Mitte nennen, wenn sie Bridges anwenden: „Wer ist in der Endungs-Phase – Maria oder Klaus?" Abstraktes Modelldenken verhindert die Dreyfus-Stufe-4-Leistung; konkrete Personendiagnose erzwingt sie.</a:t>
             </a:r>
           </a:p>
         </p:txBody>
@@ -1312,32 +1252,22 @@
           <a:lstStyle/>
           <a:p>
             <a:r>
-              <a:t>Mindesttiefe klar machen: Kein Datum in Teil C = kein substanzielle Fallberatung. TN nach 15 Min. prüfen: Steht da ein Datum oder nur eine Phase?</a:t>
-            </a:r>
-          </a:p>
-          <a:p>
-            <a:r>
-              <a:t>Gruppen vorab einteilen – keine Selbstwahl (Grüppchenbildung vermeiden).</a:t>
-            </a:r>
-          </a:p>
-          <a:p>
-            <a:r>
-              <a:t>Fallberatungs-Takt: 4 Min. Präsentation, je 2 Min. Rückmeldung (Was überzeugt? Welche Frage fehlt? Was fehlt im Plan?).</a:t>
-            </a:r>
-          </a:p>
-          <a:p>
-            <a:r>
-              <a:t>Falls TN Situation zu vertraulich empfindet: Thomas/Team-Mitte als Projektionsfläche anbieten, Erkenntnisse mental übertragen.</a:t>
-            </a:r>
-          </a:p>
-          <a:p>
-            <a:r>
-              <a:t>Plenumssicherung (5 Min.): Welcher Fallberatungshinweis war am wertvollsten – und warum?</a:t>
-            </a:r>
-          </a:p>
-          <a:p>
-            <a:r>
-              <a:t>Moderation (HB Sec 3): Regieanweisung: Die drei Modelle nicht als gleichwertig behandeln. Lewin ist die kürzeste Einheit (Grundstruktur), Kotter die operativste (Checkliste), Bridges die emotional tiefste und für FK-Teamleiter in der Regel am stärksten überraschend. Den meisten Raum auf Bridges legen – Endings ist das, was in der Praxis am häufigsten übersprungen wird. Moderationshinweis Kotter-Analyse: Wenn TN AB-1 Schritt 2 bearbeiten und alle acht Stufen als defizitär markieren, ist das ein Signal, dass sie das Modell noch nicht als diagnostisches Werkzeug nutzen, sondern als Schulaufgabe. Nachfragen: „Wenn Sie eine Rangliste der Defizite machen müssten – welche Stufe hat die höchsten Kosten, wenn sie fehlt?" Ziel: Prioritätensetzung statt Vollständigkeitssicherung. Moderationshinweis Bridges: TN sollen konkrete Namen aus dem Praxisfall Thomas / Team Mitte nennen, wenn sie Bridges anwenden: „Wer ist in der Endungs-Phase – Maria oder Klaus?" Abstraktes Modelldenken verhindert die Dreyfus-Stufe-4-Leistung; konkrete Personendiagnose erzwingt sie.</a:t>
+              <a:t>Transferaufgabe auf Moderationskarte schreiben – TN nehmen sie mit.</a:t>
+            </a:r>
+          </a:p>
+          <a:p>
+            <a:r>
+              <a:t>Jeden TN einen konkreten ersten Schritt mit Datum benennen lassen.</a:t>
+            </a:r>
+          </a:p>
+          <a:p>
+            <a:r>
+              <a:t>Selbstcheck (Sec 5): in Stille ausfüllen, ca. 3 Min.</a:t>
+            </a:r>
+          </a:p>
+          <a:p>
+            <a:r>
+              <a:t>Brücke TL10: Wer Veränderung auf Teamebene gestalten kann, ist bereit für Führen in Unsicherheit auf Organisationsebene.</a:t>
             </a:r>
           </a:p>
         </p:txBody>
@@ -10815,7 +10745,7 @@
             <a:avLst/>
           </a:prstGeom>
           <a:solidFill>
-            <a:srgbClr val="EDEDF3"/>
+            <a:srgbClr val="1F2C56"/>
           </a:solidFill>
           <a:ln>
             <a:noFill/>
@@ -10851,129 +10781,8 @@
         </p:nvSpPr>
         <p:spPr>
           <a:xfrm>
-            <a:off x="0" y="0"/>
-            <a:ext cx="12188952" cy="50292"/>
-          </a:xfrm>
-          <a:prstGeom prst="rect">
-            <a:avLst/>
-          </a:prstGeom>
-          <a:solidFill>
-            <a:srgbClr val="1F2C56"/>
-          </a:solidFill>
-          <a:ln>
-            <a:noFill/>
-          </a:ln>
-        </p:spPr>
-        <p:style>
-          <a:lnRef idx="1">
-            <a:schemeClr val="accent1"/>
-          </a:lnRef>
-          <a:fillRef idx="3">
-            <a:schemeClr val="accent1"/>
-          </a:fillRef>
-          <a:effectRef idx="2">
-            <a:schemeClr val="accent1"/>
-          </a:effectRef>
-          <a:fontRef idx="minor">
-            <a:schemeClr val="lt1"/>
-          </a:fontRef>
-        </p:style>
-        <p:txBody>
-          <a:bodyPr rtlCol="0" anchor="ctr"/>
-          <a:lstStyle/>
-          <a:p>
-            <a:pPr algn="ctr"/>
-          </a:p>
-        </p:txBody>
-      </p:sp>
-      <p:sp>
-        <p:nvSpPr>
-          <p:cNvPr id="4" name="TextBox 3"/>
-          <p:cNvSpPr txBox="1"/>
-          <p:nvPr/>
-        </p:nvSpPr>
-        <p:spPr>
-          <a:xfrm>
-            <a:off x="685800" y="109728"/>
-            <a:ext cx="10817352" cy="228600"/>
-          </a:xfrm>
-          <a:prstGeom prst="rect">
-            <a:avLst/>
-          </a:prstGeom>
-          <a:noFill/>
-        </p:spPr>
-        <p:txBody>
-          <a:bodyPr wrap="none">
-            <a:spAutoFit/>
-          </a:bodyPr>
-          <a:lstStyle/>
-          <a:p>
-            <a:pPr algn="l"/>
-            <a:r>
-              <a:rPr sz="750">
-                <a:solidFill>
-                  <a:srgbClr val="78808C"/>
-                </a:solidFill>
-                <a:latin typeface="Consolas"/>
-              </a:rPr>
-              <a:t>TL09  ·  INHALT</a:t>
-            </a:r>
-          </a:p>
-        </p:txBody>
-      </p:sp>
-      <p:sp>
-        <p:nvSpPr>
-          <p:cNvPr id="5" name="Rectangle 4"/>
-          <p:cNvSpPr/>
-          <p:nvPr/>
-        </p:nvSpPr>
-        <p:spPr>
-          <a:xfrm>
-            <a:off x="0" y="1234440"/>
-            <a:ext cx="12188952" cy="12700"/>
-          </a:xfrm>
-          <a:prstGeom prst="rect">
-            <a:avLst/>
-          </a:prstGeom>
-          <a:solidFill>
-            <a:srgbClr val="D8DFE4"/>
-          </a:solidFill>
-          <a:ln>
-            <a:noFill/>
-          </a:ln>
-        </p:spPr>
-        <p:style>
-          <a:lnRef idx="1">
-            <a:schemeClr val="accent1"/>
-          </a:lnRef>
-          <a:fillRef idx="3">
-            <a:schemeClr val="accent1"/>
-          </a:fillRef>
-          <a:effectRef idx="2">
-            <a:schemeClr val="accent1"/>
-          </a:effectRef>
-          <a:fontRef idx="minor">
-            <a:schemeClr val="lt1"/>
-          </a:fontRef>
-        </p:style>
-        <p:txBody>
-          <a:bodyPr rtlCol="0" anchor="ctr"/>
-          <a:lstStyle/>
-          <a:p>
-            <a:pPr algn="ctr"/>
-          </a:p>
-        </p:txBody>
-      </p:sp>
-      <p:sp>
-        <p:nvSpPr>
-          <p:cNvPr id="6" name="Rectangle 5"/>
-          <p:cNvSpPr/>
-          <p:nvPr/>
-        </p:nvSpPr>
-        <p:spPr>
-          <a:xfrm>
-            <a:off x="685800" y="502920"/>
-            <a:ext cx="36576" cy="658368"/>
+            <a:off x="685800" y="2788920"/>
+            <a:ext cx="548640" cy="38100"/>
           </a:xfrm>
           <a:prstGeom prst="rect">
             <a:avLst/>
@@ -11009,14 +10818,14 @@
       </p:sp>
       <p:sp>
         <p:nvSpPr>
-          <p:cNvPr id="7" name="TextBox 6"/>
+          <p:cNvPr id="4" name="TextBox 3"/>
           <p:cNvSpPr txBox="1"/>
           <p:nvPr/>
         </p:nvSpPr>
         <p:spPr>
           <a:xfrm>
-            <a:off x="813816" y="502920"/>
-            <a:ext cx="10634472" cy="685800"/>
+            <a:off x="685800" y="3017520"/>
+            <a:ext cx="10817352" cy="1463040"/>
           </a:xfrm>
           <a:prstGeom prst="rect">
             <a:avLst/>
@@ -11031,9 +10840,9 @@
           <a:p>
             <a:pPr algn="l"/>
             <a:r>
-              <a:rPr sz="2400" b="1" i="0">
-                <a:solidFill>
-                  <a:srgbClr val="1F2C56"/>
+              <a:rPr sz="4000" b="1" i="0">
+                <a:solidFill>
+                  <a:srgbClr val="FFFFFF"/>
                 </a:solidFill>
                 <a:latin typeface="Arial"/>
               </a:rPr>
@@ -11044,57 +10853,49 @@
       </p:sp>
       <p:sp>
         <p:nvSpPr>
-          <p:cNvPr id="8" name="Rectangle 7"/>
-          <p:cNvSpPr/>
-          <p:nvPr/>
-        </p:nvSpPr>
-        <p:spPr>
-          <a:xfrm>
-            <a:off x="0" y="6510528"/>
-            <a:ext cx="12188952" cy="347472"/>
-          </a:xfrm>
-          <a:prstGeom prst="rect">
-            <a:avLst/>
-          </a:prstGeom>
-          <a:solidFill>
-            <a:srgbClr val="0A1937"/>
-          </a:solidFill>
-          <a:ln>
-            <a:noFill/>
-          </a:ln>
-        </p:spPr>
-        <p:style>
-          <a:lnRef idx="1">
-            <a:schemeClr val="accent1"/>
-          </a:lnRef>
-          <a:fillRef idx="3">
-            <a:schemeClr val="accent1"/>
-          </a:fillRef>
-          <a:effectRef idx="2">
-            <a:schemeClr val="accent1"/>
-          </a:effectRef>
-          <a:fontRef idx="minor">
-            <a:schemeClr val="lt1"/>
-          </a:fontRef>
-        </p:style>
-        <p:txBody>
-          <a:bodyPr rtlCol="0" anchor="ctr"/>
-          <a:lstStyle/>
-          <a:p>
-            <a:pPr algn="ctr"/>
-          </a:p>
-        </p:txBody>
-      </p:sp>
-      <p:sp>
-        <p:nvSpPr>
-          <p:cNvPr id="9" name="TextBox 8"/>
+          <p:cNvPr id="5" name="TextBox 4"/>
           <p:cNvSpPr txBox="1"/>
           <p:nvPr/>
         </p:nvSpPr>
         <p:spPr>
           <a:xfrm>
-            <a:off x="685800" y="6583680"/>
-            <a:ext cx="6490411" cy="256032"/>
+            <a:off x="685800" y="4480560"/>
+            <a:ext cx="8653881" cy="1280160"/>
+          </a:xfrm>
+          <a:prstGeom prst="rect">
+            <a:avLst/>
+          </a:prstGeom>
+          <a:noFill/>
+        </p:spPr>
+        <p:txBody>
+          <a:bodyPr wrap="square">
+            <a:spAutoFit/>
+          </a:bodyPr>
+          <a:lstStyle/>
+          <a:p>
+            <a:pPr algn="l"/>
+            <a:r>
+              <a:rPr sz="1600" b="0" i="0">
+                <a:solidFill>
+                  <a:srgbClr val="C8D2E6"/>
+                </a:solidFill>
+                <a:latin typeface="Arial"/>
+              </a:rPr>
+              <a:t>Bevor wir Modelle anschauen: unsere eigene Erfahrung</a:t>
+            </a:r>
+          </a:p>
+        </p:txBody>
+      </p:sp>
+      <p:sp>
+        <p:nvSpPr>
+          <p:cNvPr id="6" name="TextBox 5"/>
+          <p:cNvSpPr txBox="1"/>
+          <p:nvPr/>
+        </p:nvSpPr>
+        <p:spPr>
+          <a:xfrm>
+            <a:off x="685800" y="6355080"/>
+            <a:ext cx="10817352" cy="274320"/>
           </a:xfrm>
           <a:prstGeom prst="rect">
             <a:avLst/>
@@ -11111,7 +10912,7 @@
             <a:r>
               <a:rPr sz="700">
                 <a:solidFill>
-                  <a:srgbClr val="A0B4D2"/>
+                  <a:srgbClr val="8CA0C3"/>
                 </a:solidFill>
                 <a:latin typeface="Consolas"/>
               </a:rPr>

--- a/protected-downloads/praesentation/TL09.pptx
+++ b/protected-downloads/praesentation/TL09.pptx
@@ -26,6 +26,7 @@
     <p:sldId id="274" r:id="rId26"/>
     <p:sldId id="275" r:id="rId27"/>
     <p:sldId id="276" r:id="rId28"/>
+    <p:sldId id="277" r:id="rId29"/>
   </p:sldIdLst>
   <p:sldSz cx="12188952" cy="6858000" type="screen4x3"/>
   <p:notesSz cx="6858000" cy="9144000"/>
@@ -592,6 +593,91 @@
           <a:lstStyle/>
           <a:p>
             <a:r>
+              <a:t>Transferaufgabe auf Moderationskarte schreiben – TN nehmen sie mit.</a:t>
+            </a:r>
+          </a:p>
+          <a:p>
+            <a:r>
+              <a:t>Jeden TN einen konkreten ersten Schritt mit Datum benennen lassen.</a:t>
+            </a:r>
+          </a:p>
+          <a:p>
+            <a:r>
+              <a:t>Selbstcheck (Sec 5): in Stille ausfüllen, ca. 3 Min.</a:t>
+            </a:r>
+          </a:p>
+          <a:p>
+            <a:r>
+              <a:t>Brücke TL10: Wer Veränderung auf Teamebene gestalten kann, ist bereit für Führen in Unsicherheit auf Organisationsebene.</a:t>
+            </a:r>
+          </a:p>
+        </p:txBody>
+      </p:sp>
+      <p:sp>
+        <p:nvSpPr>
+          <p:cNvPr id="4" name="Slide Number Placeholder 3"/>
+          <p:cNvSpPr>
+            <a:spLocks noGrp="1"/>
+          </p:cNvSpPr>
+          <p:nvPr>
+            <p:ph type="sldNum" idx="5" sz="quarter"/>
+          </p:nvPr>
+        </p:nvSpPr>
+        <p:spPr/>
+      </p:sp>
+    </p:spTree>
+  </p:cSld>
+  <p:clrMapOvr>
+    <a:masterClrMapping/>
+  </p:clrMapOvr>
+</p:notes>
+</file>
+
+<file path=ppt/notesSlides/notesSlide11.xml><?xml version="1.0" encoding="utf-8"?>
+<p:notes xmlns:a="http://schemas.openxmlformats.org/drawingml/2006/main" xmlns:p="http://schemas.openxmlformats.org/presentationml/2006/main" xmlns:r="http://schemas.openxmlformats.org/officeDocument/2006/relationships">
+  <p:cSld>
+    <p:spTree>
+      <p:nvGrpSpPr>
+        <p:cNvPr id="1" name=""/>
+        <p:cNvGrpSpPr/>
+        <p:nvPr/>
+      </p:nvGrpSpPr>
+      <p:grpSpPr>
+        <a:xfrm>
+          <a:off x="0" y="0"/>
+          <a:ext cx="0" cy="0"/>
+          <a:chOff x="0" y="0"/>
+          <a:chExt cx="0" cy="0"/>
+        </a:xfrm>
+      </p:grpSpPr>
+      <p:sp>
+        <p:nvSpPr>
+          <p:cNvPr id="2" name="Slide Image Placeholder 1"/>
+          <p:cNvSpPr>
+            <a:spLocks noGrp="1"/>
+          </p:cNvSpPr>
+          <p:nvPr>
+            <p:ph type="sldImg" idx="2"/>
+          </p:nvPr>
+        </p:nvSpPr>
+        <p:spPr/>
+      </p:sp>
+      <p:sp>
+        <p:nvSpPr>
+          <p:cNvPr id="3" name="Notes Placeholder 2"/>
+          <p:cNvSpPr>
+            <a:spLocks noGrp="1"/>
+          </p:cNvSpPr>
+          <p:nvPr>
+            <p:ph type="body" idx="3" sz="quarter"/>
+          </p:nvPr>
+        </p:nvSpPr>
+        <p:spPr/>
+        <p:txBody>
+          <a:bodyPr/>
+          <a:lstStyle/>
+          <a:p>
+            <a:r>
               <a:t>Abschlussrunde (1 Satz pro TN): Was nehme ich mit?</a:t>
             </a:r>
           </a:p>
@@ -1157,32 +1243,27 @@
           <a:lstStyle/>
           <a:p>
             <a:r>
-              <a:t>Mindesttiefe klar machen: Kein Datum in Teil C = kein substanzielle Fallberatung. TN nach 15 Min. prüfen: Steht da ein Datum oder nur eine Phase?</a:t>
-            </a:r>
-          </a:p>
-          <a:p>
-            <a:r>
-              <a:t>Gruppen vorab einteilen – keine Selbstwahl (Grüppchenbildung vermeiden).</a:t>
-            </a:r>
-          </a:p>
-          <a:p>
-            <a:r>
-              <a:t>Fallberatungs-Takt: 4 Min. Präsentation, je 2 Min. Rückmeldung (Was überzeugt? Welche Frage fehlt? Was fehlt im Plan?).</a:t>
-            </a:r>
-          </a:p>
-          <a:p>
-            <a:r>
-              <a:t>Falls TN Situation zu vertraulich empfindet: Thomas/Team-Mitte als Projektionsfläche anbieten, Erkenntnisse mental übertragen.</a:t>
-            </a:r>
-          </a:p>
-          <a:p>
-            <a:r>
-              <a:t>Plenumssicherung (5 Min.): Welcher Fallberatungshinweis war am wertvollsten – und warum?</a:t>
-            </a:r>
-          </a:p>
-          <a:p>
-            <a:r>
-              <a:t>Moderation (HB Sec 3): Regieanweisung: Die drei Modelle nicht als gleichwertig behandeln. Lewin ist die kürzeste Einheit (Grundstruktur), Kotter die operativste (Checkliste), Bridges die emotional tiefste und für FK-Teamleiter in der Regel am stärksten überraschend. Den meisten Raum auf Bridges legen – Endings ist das, was in der Praxis am häufigsten übersprungen wird. Moderationshinweis Kotter-Analyse: Wenn TN AB-1 Schritt 2 bearbeiten und alle acht Stufen als defizitär markieren, ist das ein Signal, dass sie das Modell noch nicht als diagnostisches Werkzeug nutzen, sondern als Schulaufgabe. Nachfragen: „Wenn Sie eine Rangliste der Defizite machen müssten – welche Stufe hat die höchsten Kosten, wenn sie fehlt?" Ziel: Prioritätensetzung statt Vollständigkeitssicherung. Moderationshinweis Bridges: TN sollen konkrete Namen aus dem Praxisfall Thomas / Team Mitte nennen, wenn sie Bridges anwenden: „Wer ist in der Endungs-Phase – Maria oder Klaus?" Abstraktes Modelldenken verhindert die Dreyfus-Stufe-4-Leistung; konkrete Personendiagnose erzwingt sie.</a:t>
+              <a:t>AB-1 Schritte 1–3: Einzelarbeit 15 Min., dann Plenumsdiskussion.</a:t>
+            </a:r>
+          </a:p>
+          <a:p>
+            <a:r>
+              <a:t>Fokus-Frage Schritt 2: Welche Kotter-Stufe hat den höchsten Kostenfaktor, wenn sie fehlt? Nicht: Welche fehlt alles.</a:t>
+            </a:r>
+          </a:p>
+          <a:p>
+            <a:r>
+              <a:t>Fokus-Frage Schritt 3 (Bridges): Was verliert Maria wirklich – und wie hätte Thomas das anerkennen können?</a:t>
+            </a:r>
+          </a:p>
+          <a:p>
+            <a:r>
+              <a:t>Frage 6 (öffentlicher Widerstand): Drei Reaktionen, die Thomas vermeiden muss – TN nennen sie zuerst, Trainer ergänzt.</a:t>
+            </a:r>
+          </a:p>
+          <a:p>
+            <a:r>
+              <a:t>Musterlösung nicht vorlesen – als Referenz nutzen, auf Basis echter TN-Antworten modifizieren.</a:t>
             </a:r>
           </a:p>
         </p:txBody>
@@ -1252,22 +1333,32 @@
           <a:lstStyle/>
           <a:p>
             <a:r>
-              <a:t>Transferaufgabe auf Moderationskarte schreiben – TN nehmen sie mit.</a:t>
-            </a:r>
-          </a:p>
-          <a:p>
-            <a:r>
-              <a:t>Jeden TN einen konkreten ersten Schritt mit Datum benennen lassen.</a:t>
-            </a:r>
-          </a:p>
-          <a:p>
-            <a:r>
-              <a:t>Selbstcheck (Sec 5): in Stille ausfüllen, ca. 3 Min.</a:t>
-            </a:r>
-          </a:p>
-          <a:p>
-            <a:r>
-              <a:t>Brücke TL10: Wer Veränderung auf Teamebene gestalten kann, ist bereit für Führen in Unsicherheit auf Organisationsebene.</a:t>
+              <a:t>Mindesttiefe klar machen: Kein Datum in Teil C = kein substanzielle Fallberatung. TN nach 15 Min. prüfen: Steht da ein Datum oder nur eine Phase?</a:t>
+            </a:r>
+          </a:p>
+          <a:p>
+            <a:r>
+              <a:t>Gruppen vorab einteilen – keine Selbstwahl (Grüppchenbildung vermeiden).</a:t>
+            </a:r>
+          </a:p>
+          <a:p>
+            <a:r>
+              <a:t>Fallberatungs-Takt: 4 Min. Präsentation, je 2 Min. Rückmeldung (Was überzeugt? Welche Frage fehlt? Was fehlt im Plan?).</a:t>
+            </a:r>
+          </a:p>
+          <a:p>
+            <a:r>
+              <a:t>Falls TN Situation zu vertraulich empfindet: Thomas/Team-Mitte als Projektionsfläche anbieten, Erkenntnisse mental übertragen.</a:t>
+            </a:r>
+          </a:p>
+          <a:p>
+            <a:r>
+              <a:t>Plenumssicherung (5 Min.): Welcher Fallberatungshinweis war am wertvollsten – und warum?</a:t>
+            </a:r>
+          </a:p>
+          <a:p>
+            <a:r>
+              <a:t>Moderation (HB Sec 3): Regieanweisung: Die drei Modelle nicht als gleichwertig behandeln. Lewin ist die kürzeste Einheit (Grundstruktur), Kotter die operativste (Checkliste), Bridges die emotional tiefste und für FK-Teamleiter in der Regel am stärksten überraschend. Den meisten Raum auf Bridges legen – Endings ist das, was in der Praxis am häufigsten übersprungen wird. Moderationshinweis Kotter-Analyse: Wenn TN AB-1 Schritt 2 bearbeiten und alle acht Stufen als defizitär markieren, ist das ein Signal, dass sie das Modell noch nicht als diagnostisches Werkzeug nutzen, sondern als Schulaufgabe. Nachfragen: „Wenn Sie eine Rangliste der Defizite machen müssten – welche Stufe hat die höchsten Kosten, wenn sie fehlt?" Ziel: Prioritätensetzung statt Vollständigkeitssicherung. Moderationshinweis Bridges: TN sollen konkrete Namen aus dem Praxisfall Thomas / Team Mitte nennen, wenn sie Bridges anwenden: „Wer ist in der Endungs-Phase – Maria oder Klaus?" Abstraktes Modelldenken verhindert die Dreyfus-Stufe-4-Leistung; konkrete Personendiagnose erzwingt sie.</a:t>
             </a:r>
           </a:p>
         </p:txBody>
@@ -7419,6 +7510,49 @@
             <a:avLst/>
           </a:prstGeom>
           <a:solidFill>
+            <a:srgbClr val="EDEDF3"/>
+          </a:solidFill>
+          <a:ln>
+            <a:noFill/>
+          </a:ln>
+        </p:spPr>
+        <p:style>
+          <a:lnRef idx="1">
+            <a:schemeClr val="accent1"/>
+          </a:lnRef>
+          <a:fillRef idx="3">
+            <a:schemeClr val="accent1"/>
+          </a:fillRef>
+          <a:effectRef idx="2">
+            <a:schemeClr val="accent1"/>
+          </a:effectRef>
+          <a:fontRef idx="minor">
+            <a:schemeClr val="lt1"/>
+          </a:fontRef>
+        </p:style>
+        <p:txBody>
+          <a:bodyPr rtlCol="0" anchor="ctr"/>
+          <a:lstStyle/>
+          <a:p>
+            <a:pPr algn="ctr"/>
+          </a:p>
+        </p:txBody>
+      </p:sp>
+      <p:sp>
+        <p:nvSpPr>
+          <p:cNvPr id="3" name="Rectangle 2"/>
+          <p:cNvSpPr/>
+          <p:nvPr/>
+        </p:nvSpPr>
+        <p:spPr>
+          <a:xfrm>
+            <a:off x="0" y="0"/>
+            <a:ext cx="12188952" cy="50292"/>
+          </a:xfrm>
+          <a:prstGeom prst="rect">
+            <a:avLst/>
+          </a:prstGeom>
+          <a:solidFill>
             <a:srgbClr val="1F2C56"/>
           </a:solidFill>
           <a:ln>
@@ -7449,14 +7583,14 @@
       </p:sp>
       <p:sp>
         <p:nvSpPr>
-          <p:cNvPr id="3" name="TextBox 2"/>
+          <p:cNvPr id="4" name="TextBox 3"/>
           <p:cNvSpPr txBox="1"/>
           <p:nvPr/>
         </p:nvSpPr>
         <p:spPr>
           <a:xfrm>
-            <a:off x="685800" y="2377440"/>
-            <a:ext cx="10817352" cy="365760"/>
+            <a:off x="685800" y="109728"/>
+            <a:ext cx="10817352" cy="228600"/>
           </a:xfrm>
           <a:prstGeom prst="rect">
             <a:avLst/>
@@ -7471,27 +7605,70 @@
           <a:p>
             <a:pPr algn="l"/>
             <a:r>
-              <a:rPr sz="1200">
-                <a:solidFill>
-                  <a:srgbClr val="D9C089"/>
+              <a:rPr sz="750">
+                <a:solidFill>
+                  <a:srgbClr val="78808C"/>
                 </a:solidFill>
                 <a:latin typeface="Consolas"/>
               </a:rPr>
-              <a:t>EINZELARBEIT (30 MIN.) + KOLLEGIALE FALLBERATUNG (25 MIN.)</a:t>
-            </a:r>
-          </a:p>
-        </p:txBody>
-      </p:sp>
-      <p:sp>
-        <p:nvSpPr>
-          <p:cNvPr id="4" name="Rectangle 3"/>
+              <a:t>TL09  ·  PRAXISFALL</a:t>
+            </a:r>
+          </a:p>
+        </p:txBody>
+      </p:sp>
+      <p:sp>
+        <p:nvSpPr>
+          <p:cNvPr id="5" name="Rectangle 4"/>
           <p:cNvSpPr/>
           <p:nvPr/>
         </p:nvSpPr>
         <p:spPr>
           <a:xfrm>
-            <a:off x="685800" y="2788920"/>
-            <a:ext cx="548640" cy="38100"/>
+            <a:off x="0" y="1234440"/>
+            <a:ext cx="12188952" cy="12700"/>
+          </a:xfrm>
+          <a:prstGeom prst="rect">
+            <a:avLst/>
+          </a:prstGeom>
+          <a:solidFill>
+            <a:srgbClr val="D8DFE4"/>
+          </a:solidFill>
+          <a:ln>
+            <a:noFill/>
+          </a:ln>
+        </p:spPr>
+        <p:style>
+          <a:lnRef idx="1">
+            <a:schemeClr val="accent1"/>
+          </a:lnRef>
+          <a:fillRef idx="3">
+            <a:schemeClr val="accent1"/>
+          </a:fillRef>
+          <a:effectRef idx="2">
+            <a:schemeClr val="accent1"/>
+          </a:effectRef>
+          <a:fontRef idx="minor">
+            <a:schemeClr val="lt1"/>
+          </a:fontRef>
+        </p:style>
+        <p:txBody>
+          <a:bodyPr rtlCol="0" anchor="ctr"/>
+          <a:lstStyle/>
+          <a:p>
+            <a:pPr algn="ctr"/>
+          </a:p>
+        </p:txBody>
+      </p:sp>
+      <p:sp>
+        <p:nvSpPr>
+          <p:cNvPr id="6" name="Rectangle 5"/>
+          <p:cNvSpPr/>
+          <p:nvPr/>
+        </p:nvSpPr>
+        <p:spPr>
+          <a:xfrm>
+            <a:off x="685800" y="502920"/>
+            <a:ext cx="36576" cy="658368"/>
           </a:xfrm>
           <a:prstGeom prst="rect">
             <a:avLst/>
@@ -7527,14 +7704,14 @@
       </p:sp>
       <p:sp>
         <p:nvSpPr>
-          <p:cNvPr id="5" name="TextBox 4"/>
+          <p:cNvPr id="7" name="TextBox 6"/>
           <p:cNvSpPr txBox="1"/>
           <p:nvPr/>
         </p:nvSpPr>
         <p:spPr>
           <a:xfrm>
-            <a:off x="685800" y="3017520"/>
-            <a:ext cx="10817352" cy="1463040"/>
+            <a:off x="813816" y="502920"/>
+            <a:ext cx="10634472" cy="685800"/>
           </a:xfrm>
           <a:prstGeom prst="rect">
             <a:avLst/>
@@ -7549,27 +7726,150 @@
           <a:p>
             <a:pPr algn="l"/>
             <a:r>
-              <a:rPr sz="4000" b="1" i="0">
-                <a:solidFill>
-                  <a:srgbClr val="FFFFFF"/>
+              <a:rPr sz="2400" b="1" i="0">
+                <a:solidFill>
+                  <a:srgbClr val="1F2C56"/>
                 </a:solidFill>
                 <a:latin typeface="Arial"/>
               </a:rPr>
-              <a:t>AB-2: Eigenes Veränderungsvorgehen entwerfen</a:t>
-            </a:r>
-          </a:p>
-        </p:txBody>
-      </p:sp>
-      <p:sp>
-        <p:nvSpPr>
-          <p:cNvPr id="6" name="TextBox 5"/>
+              <a:t>Teamleiter Thomas – VR-Bank Musterregion eG, Firmenkunden-Team Mitte</a:t>
+            </a:r>
+          </a:p>
+        </p:txBody>
+      </p:sp>
+      <p:sp>
+        <p:nvSpPr>
+          <p:cNvPr id="8" name="Rectangle 7"/>
+          <p:cNvSpPr/>
+          <p:nvPr/>
+        </p:nvSpPr>
+        <p:spPr>
+          <a:xfrm>
+            <a:off x="685800" y="1600200"/>
+            <a:ext cx="10817352" cy="1828800"/>
+          </a:xfrm>
+          <a:prstGeom prst="rect">
+            <a:avLst/>
+          </a:prstGeom>
+          <a:solidFill>
+            <a:srgbClr val="FFFFFF"/>
+          </a:solidFill>
+          <a:ln w="9525">
+            <a:solidFill>
+              <a:srgbClr val="D8DFE4"/>
+            </a:solidFill>
+          </a:ln>
+        </p:spPr>
+        <p:style>
+          <a:lnRef idx="1">
+            <a:schemeClr val="accent1"/>
+          </a:lnRef>
+          <a:fillRef idx="3">
+            <a:schemeClr val="accent1"/>
+          </a:fillRef>
+          <a:effectRef idx="2">
+            <a:schemeClr val="accent1"/>
+          </a:effectRef>
+          <a:fontRef idx="minor">
+            <a:schemeClr val="lt1"/>
+          </a:fontRef>
+        </p:style>
+        <p:txBody>
+          <a:bodyPr rtlCol="0" anchor="ctr"/>
+          <a:lstStyle/>
+          <a:p>
+            <a:pPr algn="ctr"/>
+          </a:p>
+        </p:txBody>
+      </p:sp>
+      <p:sp>
+        <p:nvSpPr>
+          <p:cNvPr id="9" name="Rectangle 8"/>
+          <p:cNvSpPr/>
+          <p:nvPr/>
+        </p:nvSpPr>
+        <p:spPr>
+          <a:xfrm>
+            <a:off x="685800" y="1600200"/>
+            <a:ext cx="36576" cy="1828800"/>
+          </a:xfrm>
+          <a:prstGeom prst="rect">
+            <a:avLst/>
+          </a:prstGeom>
+          <a:solidFill>
+            <a:srgbClr val="1F2C56"/>
+          </a:solidFill>
+          <a:ln>
+            <a:noFill/>
+          </a:ln>
+        </p:spPr>
+        <p:style>
+          <a:lnRef idx="1">
+            <a:schemeClr val="accent1"/>
+          </a:lnRef>
+          <a:fillRef idx="3">
+            <a:schemeClr val="accent1"/>
+          </a:fillRef>
+          <a:effectRef idx="2">
+            <a:schemeClr val="accent1"/>
+          </a:effectRef>
+          <a:fontRef idx="minor">
+            <a:schemeClr val="lt1"/>
+          </a:fontRef>
+        </p:style>
+        <p:txBody>
+          <a:bodyPr rtlCol="0" anchor="ctr"/>
+          <a:lstStyle/>
+          <a:p>
+            <a:pPr algn="ctr"/>
+          </a:p>
+        </p:txBody>
+      </p:sp>
+      <p:sp>
+        <p:nvSpPr>
+          <p:cNvPr id="10" name="TextBox 9"/>
           <p:cNvSpPr txBox="1"/>
           <p:nvPr/>
         </p:nvSpPr>
         <p:spPr>
           <a:xfrm>
-            <a:off x="685800" y="4480560"/>
-            <a:ext cx="8653881" cy="1280160"/>
+            <a:off x="941832" y="1783080"/>
+            <a:ext cx="10268712" cy="228600"/>
+          </a:xfrm>
+          <a:prstGeom prst="rect">
+            <a:avLst/>
+          </a:prstGeom>
+          <a:noFill/>
+        </p:spPr>
+        <p:txBody>
+          <a:bodyPr wrap="none">
+            <a:spAutoFit/>
+          </a:bodyPr>
+          <a:lstStyle/>
+          <a:p>
+            <a:pPr algn="l"/>
+            <a:r>
+              <a:rPr sz="750">
+                <a:solidFill>
+                  <a:srgbClr val="78808C"/>
+                </a:solidFill>
+                <a:latin typeface="Consolas"/>
+              </a:rPr>
+              <a:t>AUSGANGSSITUATION</a:t>
+            </a:r>
+          </a:p>
+        </p:txBody>
+      </p:sp>
+      <p:sp>
+        <p:nvSpPr>
+          <p:cNvPr id="11" name="TextBox 10"/>
+          <p:cNvSpPr txBox="1"/>
+          <p:nvPr/>
+        </p:nvSpPr>
+        <p:spPr>
+          <a:xfrm>
+            <a:off x="941832" y="2084831"/>
+            <a:ext cx="7680960" cy="1188720"/>
           </a:xfrm>
           <a:prstGeom prst="rect">
             <a:avLst/>
@@ -7582,29 +7882,77 @@
           </a:bodyPr>
           <a:lstStyle/>
           <a:p>
-            <a:pPr algn="l"/>
-            <a:r>
-              <a:rPr sz="1600" b="0" i="0">
-                <a:solidFill>
-                  <a:srgbClr val="C8D2E6"/>
+            <a:pPr>
+              <a:spcAft>
+                <a:spcPts val="600"/>
+              </a:spcAft>
+            </a:pPr>
+            <a:r>
+              <a:rPr sz="1500">
+                <a:solidFill>
+                  <a:srgbClr val="3D5466"/>
                 </a:solidFill>
                 <a:latin typeface="Arial"/>
               </a:rPr>
-              <a:t>Change-Story, Beteiligungsformat, Meilensteinplan, individuelle Begleitung</a:t>
-            </a:r>
-          </a:p>
-        </p:txBody>
-      </p:sp>
-      <p:sp>
-        <p:nvSpPr>
-          <p:cNvPr id="7" name="TextBox 6"/>
+              <a:t>Der Vorstand beschließt ein strukturiertes Beratungskonzept: Gesprächsleitfaden in agree, 24-Stunden-Dokumentationspflicht, formalisierter Jahres-Review. Maria (22 J. Erfahrung) und Klaus (17 J.) sehen ihren Beziehungsansatz gefährdet und signalisieren Widerstand. In der ersten Teamsitzung sagt Maria öffentlich: „Ehrlich gesagt halte ich das für Aktionismus." Alle schauen auf Thomas.
+</a:t>
+            </a:r>
+          </a:p>
+        </p:txBody>
+      </p:sp>
+      <p:sp>
+        <p:nvSpPr>
+          <p:cNvPr id="12" name="Rectangle 11"/>
+          <p:cNvSpPr/>
+          <p:nvPr/>
+        </p:nvSpPr>
+        <p:spPr>
+          <a:xfrm>
+            <a:off x="0" y="6510528"/>
+            <a:ext cx="12188952" cy="347472"/>
+          </a:xfrm>
+          <a:prstGeom prst="rect">
+            <a:avLst/>
+          </a:prstGeom>
+          <a:solidFill>
+            <a:srgbClr val="0A1937"/>
+          </a:solidFill>
+          <a:ln>
+            <a:noFill/>
+          </a:ln>
+        </p:spPr>
+        <p:style>
+          <a:lnRef idx="1">
+            <a:schemeClr val="accent1"/>
+          </a:lnRef>
+          <a:fillRef idx="3">
+            <a:schemeClr val="accent1"/>
+          </a:fillRef>
+          <a:effectRef idx="2">
+            <a:schemeClr val="accent1"/>
+          </a:effectRef>
+          <a:fontRef idx="minor">
+            <a:schemeClr val="lt1"/>
+          </a:fontRef>
+        </p:style>
+        <p:txBody>
+          <a:bodyPr rtlCol="0" anchor="ctr"/>
+          <a:lstStyle/>
+          <a:p>
+            <a:pPr algn="ctr"/>
+          </a:p>
+        </p:txBody>
+      </p:sp>
+      <p:sp>
+        <p:nvSpPr>
+          <p:cNvPr id="13" name="TextBox 12"/>
           <p:cNvSpPr txBox="1"/>
           <p:nvPr/>
         </p:nvSpPr>
         <p:spPr>
           <a:xfrm>
-            <a:off x="685800" y="6355080"/>
-            <a:ext cx="10817352" cy="274320"/>
+            <a:off x="685800" y="6583680"/>
+            <a:ext cx="6490411" cy="256032"/>
           </a:xfrm>
           <a:prstGeom prst="rect">
             <a:avLst/>
@@ -7621,11 +7969,46 @@
             <a:r>
               <a:rPr sz="700">
                 <a:solidFill>
-                  <a:srgbClr val="8CA0C3"/>
+                  <a:srgbClr val="A0B4D2"/>
                 </a:solidFill>
                 <a:latin typeface="Consolas"/>
               </a:rPr>
               <a:t>FKB Campus  ·  TL09</a:t>
+            </a:r>
+          </a:p>
+        </p:txBody>
+      </p:sp>
+      <p:sp>
+        <p:nvSpPr>
+          <p:cNvPr id="14" name="TextBox 13"/>
+          <p:cNvSpPr txBox="1"/>
+          <p:nvPr/>
+        </p:nvSpPr>
+        <p:spPr>
+          <a:xfrm>
+            <a:off x="7176211" y="6583680"/>
+            <a:ext cx="4326940" cy="256032"/>
+          </a:xfrm>
+          <a:prstGeom prst="rect">
+            <a:avLst/>
+          </a:prstGeom>
+          <a:noFill/>
+        </p:spPr>
+        <p:txBody>
+          <a:bodyPr wrap="none">
+            <a:spAutoFit/>
+          </a:bodyPr>
+          <a:lstStyle/>
+          <a:p>
+            <a:pPr algn="r"/>
+            <a:r>
+              <a:rPr sz="700">
+                <a:solidFill>
+                  <a:srgbClr val="A0B4D2"/>
+                </a:solidFill>
+                <a:latin typeface="Consolas"/>
+              </a:rPr>
+              <a:t>Fall zuerst lesen</a:t>
             </a:r>
           </a:p>
         </p:txBody>
@@ -7663,7 +8046,7 @@
             <a:avLst/>
           </a:prstGeom>
           <a:solidFill>
-            <a:srgbClr val="EDEDF3"/>
+            <a:srgbClr val="1F2C56"/>
           </a:solidFill>
           <a:ln>
             <a:noFill/>
@@ -7693,57 +8076,14 @@
       </p:sp>
       <p:sp>
         <p:nvSpPr>
-          <p:cNvPr id="3" name="Rectangle 2"/>
-          <p:cNvSpPr/>
-          <p:nvPr/>
-        </p:nvSpPr>
-        <p:spPr>
-          <a:xfrm>
-            <a:off x="0" y="0"/>
-            <a:ext cx="12188952" cy="50292"/>
-          </a:xfrm>
-          <a:prstGeom prst="rect">
-            <a:avLst/>
-          </a:prstGeom>
-          <a:solidFill>
-            <a:srgbClr val="1F2C56"/>
-          </a:solidFill>
-          <a:ln>
-            <a:noFill/>
-          </a:ln>
-        </p:spPr>
-        <p:style>
-          <a:lnRef idx="1">
-            <a:schemeClr val="accent1"/>
-          </a:lnRef>
-          <a:fillRef idx="3">
-            <a:schemeClr val="accent1"/>
-          </a:fillRef>
-          <a:effectRef idx="2">
-            <a:schemeClr val="accent1"/>
-          </a:effectRef>
-          <a:fontRef idx="minor">
-            <a:schemeClr val="lt1"/>
-          </a:fontRef>
-        </p:style>
-        <p:txBody>
-          <a:bodyPr rtlCol="0" anchor="ctr"/>
-          <a:lstStyle/>
-          <a:p>
-            <a:pPr algn="ctr"/>
-          </a:p>
-        </p:txBody>
-      </p:sp>
-      <p:sp>
-        <p:nvSpPr>
-          <p:cNvPr id="4" name="TextBox 3"/>
+          <p:cNvPr id="3" name="TextBox 2"/>
           <p:cNvSpPr txBox="1"/>
           <p:nvPr/>
         </p:nvSpPr>
         <p:spPr>
           <a:xfrm>
-            <a:off x="685800" y="109728"/>
-            <a:ext cx="10817352" cy="228600"/>
+            <a:off x="685800" y="2377440"/>
+            <a:ext cx="10817352" cy="365760"/>
           </a:xfrm>
           <a:prstGeom prst="rect">
             <a:avLst/>
@@ -7758,70 +8098,27 @@
           <a:p>
             <a:pPr algn="l"/>
             <a:r>
-              <a:rPr sz="750">
-                <a:solidFill>
-                  <a:srgbClr val="78808C"/>
+              <a:rPr sz="1200">
+                <a:solidFill>
+                  <a:srgbClr val="D9C089"/>
                 </a:solidFill>
                 <a:latin typeface="Consolas"/>
               </a:rPr>
-              <a:t>TL09  ·  ARBEITSBLATT</a:t>
-            </a:r>
-          </a:p>
-        </p:txBody>
-      </p:sp>
-      <p:sp>
-        <p:nvSpPr>
-          <p:cNvPr id="5" name="Rectangle 4"/>
+              <a:t>EINZELARBEIT (30 MIN.) + KOLLEGIALE FALLBERATUNG (25 MIN.)</a:t>
+            </a:r>
+          </a:p>
+        </p:txBody>
+      </p:sp>
+      <p:sp>
+        <p:nvSpPr>
+          <p:cNvPr id="4" name="Rectangle 3"/>
           <p:cNvSpPr/>
           <p:nvPr/>
         </p:nvSpPr>
         <p:spPr>
           <a:xfrm>
-            <a:off x="0" y="1234440"/>
-            <a:ext cx="12188952" cy="12700"/>
-          </a:xfrm>
-          <a:prstGeom prst="rect">
-            <a:avLst/>
-          </a:prstGeom>
-          <a:solidFill>
-            <a:srgbClr val="D8DFE4"/>
-          </a:solidFill>
-          <a:ln>
-            <a:noFill/>
-          </a:ln>
-        </p:spPr>
-        <p:style>
-          <a:lnRef idx="1">
-            <a:schemeClr val="accent1"/>
-          </a:lnRef>
-          <a:fillRef idx="3">
-            <a:schemeClr val="accent1"/>
-          </a:fillRef>
-          <a:effectRef idx="2">
-            <a:schemeClr val="accent1"/>
-          </a:effectRef>
-          <a:fontRef idx="minor">
-            <a:schemeClr val="lt1"/>
-          </a:fontRef>
-        </p:style>
-        <p:txBody>
-          <a:bodyPr rtlCol="0" anchor="ctr"/>
-          <a:lstStyle/>
-          <a:p>
-            <a:pPr algn="ctr"/>
-          </a:p>
-        </p:txBody>
-      </p:sp>
-      <p:sp>
-        <p:nvSpPr>
-          <p:cNvPr id="6" name="Rectangle 5"/>
-          <p:cNvSpPr/>
-          <p:nvPr/>
-        </p:nvSpPr>
-        <p:spPr>
-          <a:xfrm>
-            <a:off x="685800" y="502920"/>
-            <a:ext cx="36576" cy="658368"/>
+            <a:off x="685800" y="2788920"/>
+            <a:ext cx="548640" cy="38100"/>
           </a:xfrm>
           <a:prstGeom prst="rect">
             <a:avLst/>
@@ -7857,14 +8154,14 @@
       </p:sp>
       <p:sp>
         <p:nvSpPr>
-          <p:cNvPr id="7" name="TextBox 6"/>
+          <p:cNvPr id="5" name="TextBox 4"/>
           <p:cNvSpPr txBox="1"/>
           <p:nvPr/>
         </p:nvSpPr>
         <p:spPr>
           <a:xfrm>
-            <a:off x="813816" y="502920"/>
-            <a:ext cx="10634472" cy="685800"/>
+            <a:off x="685800" y="3017520"/>
+            <a:ext cx="10817352" cy="1463040"/>
           </a:xfrm>
           <a:prstGeom prst="rect">
             <a:avLst/>
@@ -7879,27 +8176,27 @@
           <a:p>
             <a:pPr algn="l"/>
             <a:r>
-              <a:rPr sz="2400" b="1" i="0">
-                <a:solidFill>
-                  <a:srgbClr val="1F2C56"/>
+              <a:rPr sz="4000" b="1" i="0">
+                <a:solidFill>
+                  <a:srgbClr val="FFFFFF"/>
                 </a:solidFill>
                 <a:latin typeface="Arial"/>
               </a:rPr>
-              <a:t>AB-2: Eine Change-Story, die ein skeptischer Berater abnimmt</a:t>
-            </a:r>
-          </a:p>
-        </p:txBody>
-      </p:sp>
-      <p:sp>
-        <p:nvSpPr>
-          <p:cNvPr id="8" name="TextBox 7"/>
+              <a:t>AB-2: Eigenes Veränderungsvorgehen entwerfen</a:t>
+            </a:r>
+          </a:p>
+        </p:txBody>
+      </p:sp>
+      <p:sp>
+        <p:nvSpPr>
+          <p:cNvPr id="6" name="TextBox 5"/>
           <p:cNvSpPr txBox="1"/>
           <p:nvPr/>
         </p:nvSpPr>
         <p:spPr>
           <a:xfrm>
-            <a:off x="685800" y="1554480"/>
-            <a:ext cx="10817352" cy="3840480"/>
+            <a:off x="685800" y="4480560"/>
+            <a:ext cx="8653881" cy="1280160"/>
           </a:xfrm>
           <a:prstGeom prst="rect">
             <a:avLst/>
@@ -7912,233 +8209,29 @@
           </a:bodyPr>
           <a:lstStyle/>
           <a:p>
-            <a:pPr marL="190500" indent="-190500">
-              <a:spcBef>
-                <a:spcPts val="400"/>
-              </a:spcBef>
-              <a:spcAft>
-                <a:spcPts val="200"/>
-              </a:spcAft>
-            </a:pPr>
-            <a:r>
-              <a:rPr sz="1400">
-                <a:solidFill>
-                  <a:srgbClr val="3D5466"/>
+            <a:pPr algn="l"/>
+            <a:r>
+              <a:rPr sz="1600" b="0" i="0">
+                <a:solidFill>
+                  <a:srgbClr val="C8D2E6"/>
                 </a:solidFill>
                 <a:latin typeface="Arial"/>
               </a:rPr>
-              <a:t>▸  Teil A: Change-Story – vier Fragen, kein Corporate-Vokabular.</a:t>
-            </a:r>
-          </a:p>
-          <a:p>
-            <a:pPr marL="190500" indent="-190500">
-              <a:spcBef>
-                <a:spcPts val="400"/>
-              </a:spcBef>
-              <a:spcAft>
-                <a:spcPts val="200"/>
-              </a:spcAft>
-            </a:pPr>
-            <a:r>
-              <a:rPr sz="1400">
-                <a:solidFill>
-                  <a:srgbClr val="3D5466"/>
-                </a:solidFill>
-                <a:latin typeface="Arial"/>
-              </a:rPr>
-              <a:t>▸  Teil B: Beteiligung – verhandelbar vs. nicht-verhandelbar klar trennen.</a:t>
-            </a:r>
-          </a:p>
-          <a:p>
-            <a:pPr marL="190500" indent="-190500">
-              <a:spcBef>
-                <a:spcPts val="400"/>
-              </a:spcBef>
-              <a:spcAft>
-                <a:spcPts val="200"/>
-              </a:spcAft>
-            </a:pPr>
-            <a:r>
-              <a:rPr sz="1400">
-                <a:solidFill>
-                  <a:srgbClr val="3D5466"/>
-                </a:solidFill>
-                <a:latin typeface="Arial"/>
-              </a:rPr>
-              <a:t>▸  Teil C: Meilensteinplan – mindestens ein Datum, ein Kommunikationspunkt.</a:t>
-            </a:r>
-          </a:p>
-          <a:p>
-            <a:pPr marL="190500" indent="-190500">
-              <a:spcBef>
-                <a:spcPts val="400"/>
-              </a:spcBef>
-              <a:spcAft>
-                <a:spcPts val="200"/>
-              </a:spcAft>
-            </a:pPr>
-            <a:r>
-              <a:rPr sz="1400">
-                <a:solidFill>
-                  <a:srgbClr val="3D5466"/>
-                </a:solidFill>
-                <a:latin typeface="Arial"/>
-              </a:rPr>
-              <a:t>▸  Teil D: Individuelle Begleitung – mindestens eine namentlich benannte Person.</a:t>
-            </a:r>
-          </a:p>
-          <a:p>
-            <a:pPr marL="190500" indent="-190500">
-              <a:spcBef>
-                <a:spcPts val="400"/>
-              </a:spcBef>
-              <a:spcAft>
-                <a:spcPts val="200"/>
-              </a:spcAft>
-            </a:pPr>
-            <a:r>
-              <a:rPr sz="1400">
-                <a:solidFill>
-                  <a:srgbClr val="3D5466"/>
-                </a:solidFill>
-                <a:latin typeface="Arial"/>
-              </a:rPr>
-              <a:t>▸  Kollegiale Fallberatung: Was überzeugt – welche Frage würde ein Skeptiker stellen?</a:t>
-            </a:r>
-          </a:p>
-        </p:txBody>
-      </p:sp>
-      <p:sp>
-        <p:nvSpPr>
-          <p:cNvPr id="9" name="Rectangle 8"/>
-          <p:cNvSpPr/>
-          <p:nvPr/>
-        </p:nvSpPr>
-        <p:spPr>
-          <a:xfrm>
-            <a:off x="685800" y="5486400"/>
-            <a:ext cx="10817352" cy="640080"/>
-          </a:xfrm>
-          <a:prstGeom prst="rect">
-            <a:avLst/>
-          </a:prstGeom>
-          <a:solidFill>
-            <a:srgbClr val="1F2C56"/>
-          </a:solidFill>
-          <a:ln>
-            <a:noFill/>
-          </a:ln>
-        </p:spPr>
-        <p:style>
-          <a:lnRef idx="1">
-            <a:schemeClr val="accent1"/>
-          </a:lnRef>
-          <a:fillRef idx="3">
-            <a:schemeClr val="accent1"/>
-          </a:fillRef>
-          <a:effectRef idx="2">
-            <a:schemeClr val="accent1"/>
-          </a:effectRef>
-          <a:fontRef idx="minor">
-            <a:schemeClr val="lt1"/>
-          </a:fontRef>
-        </p:style>
-        <p:txBody>
-          <a:bodyPr rtlCol="0" anchor="ctr"/>
-          <a:lstStyle/>
-          <a:p>
-            <a:pPr algn="ctr"/>
-          </a:p>
-        </p:txBody>
-      </p:sp>
-      <p:sp>
-        <p:nvSpPr>
-          <p:cNvPr id="10" name="TextBox 9"/>
+              <a:t>Change-Story, Beteiligungsformat, Meilensteinplan, individuelle Begleitung</a:t>
+            </a:r>
+          </a:p>
+        </p:txBody>
+      </p:sp>
+      <p:sp>
+        <p:nvSpPr>
+          <p:cNvPr id="7" name="TextBox 6"/>
           <p:cNvSpPr txBox="1"/>
           <p:nvPr/>
         </p:nvSpPr>
         <p:spPr>
           <a:xfrm>
-            <a:off x="868680" y="5596128"/>
-            <a:ext cx="10451592" cy="457200"/>
-          </a:xfrm>
-          <a:prstGeom prst="rect">
-            <a:avLst/>
-          </a:prstGeom>
-          <a:noFill/>
-        </p:spPr>
-        <p:txBody>
-          <a:bodyPr wrap="square">
-            <a:spAutoFit/>
-          </a:bodyPr>
-          <a:lstStyle/>
-          <a:p>
-            <a:pPr algn="l"/>
-            <a:r>
-              <a:rPr sz="1300" b="1" i="0">
-                <a:solidFill>
-                  <a:srgbClr val="FFFFFF"/>
-                </a:solidFill>
-                <a:latin typeface="Arial"/>
-              </a:rPr>
-              <a:t>→  Bearbeitung im Teilnehmer-Workbook (Arbeitsblatt mit Ausfüllfeldern)</a:t>
-            </a:r>
-          </a:p>
-        </p:txBody>
-      </p:sp>
-      <p:sp>
-        <p:nvSpPr>
-          <p:cNvPr id="11" name="Rectangle 10"/>
-          <p:cNvSpPr/>
-          <p:nvPr/>
-        </p:nvSpPr>
-        <p:spPr>
-          <a:xfrm>
-            <a:off x="0" y="6510528"/>
-            <a:ext cx="12188952" cy="347472"/>
-          </a:xfrm>
-          <a:prstGeom prst="rect">
-            <a:avLst/>
-          </a:prstGeom>
-          <a:solidFill>
-            <a:srgbClr val="0A1937"/>
-          </a:solidFill>
-          <a:ln>
-            <a:noFill/>
-          </a:ln>
-        </p:spPr>
-        <p:style>
-          <a:lnRef idx="1">
-            <a:schemeClr val="accent1"/>
-          </a:lnRef>
-          <a:fillRef idx="3">
-            <a:schemeClr val="accent1"/>
-          </a:fillRef>
-          <a:effectRef idx="2">
-            <a:schemeClr val="accent1"/>
-          </a:effectRef>
-          <a:fontRef idx="minor">
-            <a:schemeClr val="lt1"/>
-          </a:fontRef>
-        </p:style>
-        <p:txBody>
-          <a:bodyPr rtlCol="0" anchor="ctr"/>
-          <a:lstStyle/>
-          <a:p>
-            <a:pPr algn="ctr"/>
-          </a:p>
-        </p:txBody>
-      </p:sp>
-      <p:sp>
-        <p:nvSpPr>
-          <p:cNvPr id="12" name="TextBox 11"/>
-          <p:cNvSpPr txBox="1"/>
-          <p:nvPr/>
-        </p:nvSpPr>
-        <p:spPr>
-          <a:xfrm>
-            <a:off x="685800" y="6583680"/>
-            <a:ext cx="6490411" cy="256032"/>
+            <a:off x="685800" y="6355080"/>
+            <a:ext cx="10817352" cy="274320"/>
           </a:xfrm>
           <a:prstGeom prst="rect">
             <a:avLst/>
@@ -8155,7 +8248,7 @@
             <a:r>
               <a:rPr sz="700">
                 <a:solidFill>
-                  <a:srgbClr val="A0B4D2"/>
+                  <a:srgbClr val="8CA0C3"/>
                 </a:solidFill>
                 <a:latin typeface="Consolas"/>
               </a:rPr>
@@ -8197,6 +8290,49 @@
             <a:avLst/>
           </a:prstGeom>
           <a:solidFill>
+            <a:srgbClr val="EDEDF3"/>
+          </a:solidFill>
+          <a:ln>
+            <a:noFill/>
+          </a:ln>
+        </p:spPr>
+        <p:style>
+          <a:lnRef idx="1">
+            <a:schemeClr val="accent1"/>
+          </a:lnRef>
+          <a:fillRef idx="3">
+            <a:schemeClr val="accent1"/>
+          </a:fillRef>
+          <a:effectRef idx="2">
+            <a:schemeClr val="accent1"/>
+          </a:effectRef>
+          <a:fontRef idx="minor">
+            <a:schemeClr val="lt1"/>
+          </a:fontRef>
+        </p:style>
+        <p:txBody>
+          <a:bodyPr rtlCol="0" anchor="ctr"/>
+          <a:lstStyle/>
+          <a:p>
+            <a:pPr algn="ctr"/>
+          </a:p>
+        </p:txBody>
+      </p:sp>
+      <p:sp>
+        <p:nvSpPr>
+          <p:cNvPr id="3" name="Rectangle 2"/>
+          <p:cNvSpPr/>
+          <p:nvPr/>
+        </p:nvSpPr>
+        <p:spPr>
+          <a:xfrm>
+            <a:off x="0" y="0"/>
+            <a:ext cx="12188952" cy="50292"/>
+          </a:xfrm>
+          <a:prstGeom prst="rect">
+            <a:avLst/>
+          </a:prstGeom>
+          <a:solidFill>
             <a:srgbClr val="1F2C56"/>
           </a:solidFill>
           <a:ln>
@@ -8227,14 +8363,14 @@
       </p:sp>
       <p:sp>
         <p:nvSpPr>
-          <p:cNvPr id="3" name="TextBox 2"/>
+          <p:cNvPr id="4" name="TextBox 3"/>
           <p:cNvSpPr txBox="1"/>
           <p:nvPr/>
         </p:nvSpPr>
         <p:spPr>
           <a:xfrm>
-            <a:off x="685800" y="2377440"/>
-            <a:ext cx="10817352" cy="365760"/>
+            <a:off x="685800" y="109728"/>
+            <a:ext cx="10817352" cy="228600"/>
           </a:xfrm>
           <a:prstGeom prst="rect">
             <a:avLst/>
@@ -8249,27 +8385,70 @@
           <a:p>
             <a:pPr algn="l"/>
             <a:r>
-              <a:rPr sz="1200">
-                <a:solidFill>
-                  <a:srgbClr val="D9C089"/>
+              <a:rPr sz="750">
+                <a:solidFill>
+                  <a:srgbClr val="78808C"/>
                 </a:solidFill>
                 <a:latin typeface="Consolas"/>
               </a:rPr>
-              <a:t>ABSCHLUSS</a:t>
-            </a:r>
-          </a:p>
-        </p:txBody>
-      </p:sp>
-      <p:sp>
-        <p:nvSpPr>
-          <p:cNvPr id="4" name="Rectangle 3"/>
+              <a:t>TL09  ·  ARBEITSBLATT</a:t>
+            </a:r>
+          </a:p>
+        </p:txBody>
+      </p:sp>
+      <p:sp>
+        <p:nvSpPr>
+          <p:cNvPr id="5" name="Rectangle 4"/>
           <p:cNvSpPr/>
           <p:nvPr/>
         </p:nvSpPr>
         <p:spPr>
           <a:xfrm>
-            <a:off x="685800" y="2788920"/>
-            <a:ext cx="548640" cy="38100"/>
+            <a:off x="0" y="1234440"/>
+            <a:ext cx="12188952" cy="12700"/>
+          </a:xfrm>
+          <a:prstGeom prst="rect">
+            <a:avLst/>
+          </a:prstGeom>
+          <a:solidFill>
+            <a:srgbClr val="D8DFE4"/>
+          </a:solidFill>
+          <a:ln>
+            <a:noFill/>
+          </a:ln>
+        </p:spPr>
+        <p:style>
+          <a:lnRef idx="1">
+            <a:schemeClr val="accent1"/>
+          </a:lnRef>
+          <a:fillRef idx="3">
+            <a:schemeClr val="accent1"/>
+          </a:fillRef>
+          <a:effectRef idx="2">
+            <a:schemeClr val="accent1"/>
+          </a:effectRef>
+          <a:fontRef idx="minor">
+            <a:schemeClr val="lt1"/>
+          </a:fontRef>
+        </p:style>
+        <p:txBody>
+          <a:bodyPr rtlCol="0" anchor="ctr"/>
+          <a:lstStyle/>
+          <a:p>
+            <a:pPr algn="ctr"/>
+          </a:p>
+        </p:txBody>
+      </p:sp>
+      <p:sp>
+        <p:nvSpPr>
+          <p:cNvPr id="6" name="Rectangle 5"/>
+          <p:cNvSpPr/>
+          <p:nvPr/>
+        </p:nvSpPr>
+        <p:spPr>
+          <a:xfrm>
+            <a:off x="685800" y="502920"/>
+            <a:ext cx="36576" cy="658368"/>
           </a:xfrm>
           <a:prstGeom prst="rect">
             <a:avLst/>
@@ -8305,14 +8484,14 @@
       </p:sp>
       <p:sp>
         <p:nvSpPr>
-          <p:cNvPr id="5" name="TextBox 4"/>
+          <p:cNvPr id="7" name="TextBox 6"/>
           <p:cNvSpPr txBox="1"/>
           <p:nvPr/>
         </p:nvSpPr>
         <p:spPr>
           <a:xfrm>
-            <a:off x="685800" y="3017520"/>
-            <a:ext cx="10817352" cy="1463040"/>
+            <a:off x="813816" y="502920"/>
+            <a:ext cx="10634472" cy="685800"/>
           </a:xfrm>
           <a:prstGeom prst="rect">
             <a:avLst/>
@@ -8327,27 +8506,27 @@
           <a:p>
             <a:pPr algn="l"/>
             <a:r>
-              <a:rPr sz="4000" b="1" i="0">
-                <a:solidFill>
-                  <a:srgbClr val="FFFFFF"/>
+              <a:rPr sz="2400" b="1" i="0">
+                <a:solidFill>
+                  <a:srgbClr val="1F2C56"/>
                 </a:solidFill>
                 <a:latin typeface="Arial"/>
               </a:rPr>
-              <a:t>Transfer: Drei Aufgaben, eine Verpflichtung</a:t>
-            </a:r>
-          </a:p>
-        </p:txBody>
-      </p:sp>
-      <p:sp>
-        <p:nvSpPr>
-          <p:cNvPr id="6" name="TextBox 5"/>
+              <a:t>AB-2: Eine Change-Story, die ein skeptischer Berater abnimmt</a:t>
+            </a:r>
+          </a:p>
+        </p:txBody>
+      </p:sp>
+      <p:sp>
+        <p:nvSpPr>
+          <p:cNvPr id="8" name="TextBox 7"/>
           <p:cNvSpPr txBox="1"/>
           <p:nvPr/>
         </p:nvSpPr>
         <p:spPr>
           <a:xfrm>
-            <a:off x="685800" y="4480560"/>
-            <a:ext cx="8653881" cy="1280160"/>
+            <a:off x="685800" y="1554480"/>
+            <a:ext cx="10817352" cy="3840480"/>
           </a:xfrm>
           <a:prstGeom prst="rect">
             <a:avLst/>
@@ -8360,29 +8539,233 @@
           </a:bodyPr>
           <a:lstStyle/>
           <a:p>
+            <a:pPr marL="190500" indent="-190500">
+              <a:spcBef>
+                <a:spcPts val="400"/>
+              </a:spcBef>
+              <a:spcAft>
+                <a:spcPts val="200"/>
+              </a:spcAft>
+            </a:pPr>
+            <a:r>
+              <a:rPr sz="1400">
+                <a:solidFill>
+                  <a:srgbClr val="3D5466"/>
+                </a:solidFill>
+                <a:latin typeface="Arial"/>
+              </a:rPr>
+              <a:t>▸  Teil A: Change-Story – vier Fragen, kein Corporate-Vokabular.</a:t>
+            </a:r>
+          </a:p>
+          <a:p>
+            <a:pPr marL="190500" indent="-190500">
+              <a:spcBef>
+                <a:spcPts val="400"/>
+              </a:spcBef>
+              <a:spcAft>
+                <a:spcPts val="200"/>
+              </a:spcAft>
+            </a:pPr>
+            <a:r>
+              <a:rPr sz="1400">
+                <a:solidFill>
+                  <a:srgbClr val="3D5466"/>
+                </a:solidFill>
+                <a:latin typeface="Arial"/>
+              </a:rPr>
+              <a:t>▸  Teil B: Beteiligung – verhandelbar vs. nicht-verhandelbar klar trennen.</a:t>
+            </a:r>
+          </a:p>
+          <a:p>
+            <a:pPr marL="190500" indent="-190500">
+              <a:spcBef>
+                <a:spcPts val="400"/>
+              </a:spcBef>
+              <a:spcAft>
+                <a:spcPts val="200"/>
+              </a:spcAft>
+            </a:pPr>
+            <a:r>
+              <a:rPr sz="1400">
+                <a:solidFill>
+                  <a:srgbClr val="3D5466"/>
+                </a:solidFill>
+                <a:latin typeface="Arial"/>
+              </a:rPr>
+              <a:t>▸  Teil C: Meilensteinplan – mindestens ein Datum, ein Kommunikationspunkt.</a:t>
+            </a:r>
+          </a:p>
+          <a:p>
+            <a:pPr marL="190500" indent="-190500">
+              <a:spcBef>
+                <a:spcPts val="400"/>
+              </a:spcBef>
+              <a:spcAft>
+                <a:spcPts val="200"/>
+              </a:spcAft>
+            </a:pPr>
+            <a:r>
+              <a:rPr sz="1400">
+                <a:solidFill>
+                  <a:srgbClr val="3D5466"/>
+                </a:solidFill>
+                <a:latin typeface="Arial"/>
+              </a:rPr>
+              <a:t>▸  Teil D: Individuelle Begleitung – mindestens eine namentlich benannte Person.</a:t>
+            </a:r>
+          </a:p>
+          <a:p>
+            <a:pPr marL="190500" indent="-190500">
+              <a:spcBef>
+                <a:spcPts val="400"/>
+              </a:spcBef>
+              <a:spcAft>
+                <a:spcPts val="200"/>
+              </a:spcAft>
+            </a:pPr>
+            <a:r>
+              <a:rPr sz="1400">
+                <a:solidFill>
+                  <a:srgbClr val="3D5466"/>
+                </a:solidFill>
+                <a:latin typeface="Arial"/>
+              </a:rPr>
+              <a:t>▸  Kollegiale Fallberatung: Was überzeugt – welche Frage würde ein Skeptiker stellen?</a:t>
+            </a:r>
+          </a:p>
+        </p:txBody>
+      </p:sp>
+      <p:sp>
+        <p:nvSpPr>
+          <p:cNvPr id="9" name="Rectangle 8"/>
+          <p:cNvSpPr/>
+          <p:nvPr/>
+        </p:nvSpPr>
+        <p:spPr>
+          <a:xfrm>
+            <a:off x="685800" y="5486400"/>
+            <a:ext cx="10817352" cy="640080"/>
+          </a:xfrm>
+          <a:prstGeom prst="rect">
+            <a:avLst/>
+          </a:prstGeom>
+          <a:solidFill>
+            <a:srgbClr val="1F2C56"/>
+          </a:solidFill>
+          <a:ln>
+            <a:noFill/>
+          </a:ln>
+        </p:spPr>
+        <p:style>
+          <a:lnRef idx="1">
+            <a:schemeClr val="accent1"/>
+          </a:lnRef>
+          <a:fillRef idx="3">
+            <a:schemeClr val="accent1"/>
+          </a:fillRef>
+          <a:effectRef idx="2">
+            <a:schemeClr val="accent1"/>
+          </a:effectRef>
+          <a:fontRef idx="minor">
+            <a:schemeClr val="lt1"/>
+          </a:fontRef>
+        </p:style>
+        <p:txBody>
+          <a:bodyPr rtlCol="0" anchor="ctr"/>
+          <a:lstStyle/>
+          <a:p>
+            <a:pPr algn="ctr"/>
+          </a:p>
+        </p:txBody>
+      </p:sp>
+      <p:sp>
+        <p:nvSpPr>
+          <p:cNvPr id="10" name="TextBox 9"/>
+          <p:cNvSpPr txBox="1"/>
+          <p:nvPr/>
+        </p:nvSpPr>
+        <p:spPr>
+          <a:xfrm>
+            <a:off x="868680" y="5596128"/>
+            <a:ext cx="10451592" cy="457200"/>
+          </a:xfrm>
+          <a:prstGeom prst="rect">
+            <a:avLst/>
+          </a:prstGeom>
+          <a:noFill/>
+        </p:spPr>
+        <p:txBody>
+          <a:bodyPr wrap="square">
+            <a:spAutoFit/>
+          </a:bodyPr>
+          <a:lstStyle/>
+          <a:p>
             <a:pPr algn="l"/>
             <a:r>
-              <a:rPr sz="1600" b="0" i="0">
-                <a:solidFill>
-                  <a:srgbClr val="C8D2E6"/>
+              <a:rPr sz="1300" b="1" i="0">
+                <a:solidFill>
+                  <a:srgbClr val="FFFFFF"/>
                 </a:solidFill>
                 <a:latin typeface="Arial"/>
               </a:rPr>
-              <a:t>Selbstverpflichtung – Brücke TL10</a:t>
-            </a:r>
-          </a:p>
-        </p:txBody>
-      </p:sp>
-      <p:sp>
-        <p:nvSpPr>
-          <p:cNvPr id="7" name="TextBox 6"/>
+              <a:t>→  Bearbeitung im Teilnehmer-Workbook (Arbeitsblatt mit Ausfüllfeldern)</a:t>
+            </a:r>
+          </a:p>
+        </p:txBody>
+      </p:sp>
+      <p:sp>
+        <p:nvSpPr>
+          <p:cNvPr id="11" name="Rectangle 10"/>
+          <p:cNvSpPr/>
+          <p:nvPr/>
+        </p:nvSpPr>
+        <p:spPr>
+          <a:xfrm>
+            <a:off x="0" y="6510528"/>
+            <a:ext cx="12188952" cy="347472"/>
+          </a:xfrm>
+          <a:prstGeom prst="rect">
+            <a:avLst/>
+          </a:prstGeom>
+          <a:solidFill>
+            <a:srgbClr val="0A1937"/>
+          </a:solidFill>
+          <a:ln>
+            <a:noFill/>
+          </a:ln>
+        </p:spPr>
+        <p:style>
+          <a:lnRef idx="1">
+            <a:schemeClr val="accent1"/>
+          </a:lnRef>
+          <a:fillRef idx="3">
+            <a:schemeClr val="accent1"/>
+          </a:fillRef>
+          <a:effectRef idx="2">
+            <a:schemeClr val="accent1"/>
+          </a:effectRef>
+          <a:fontRef idx="minor">
+            <a:schemeClr val="lt1"/>
+          </a:fontRef>
+        </p:style>
+        <p:txBody>
+          <a:bodyPr rtlCol="0" anchor="ctr"/>
+          <a:lstStyle/>
+          <a:p>
+            <a:pPr algn="ctr"/>
+          </a:p>
+        </p:txBody>
+      </p:sp>
+      <p:sp>
+        <p:nvSpPr>
+          <p:cNvPr id="12" name="TextBox 11"/>
           <p:cNvSpPr txBox="1"/>
           <p:nvPr/>
         </p:nvSpPr>
         <p:spPr>
           <a:xfrm>
-            <a:off x="685800" y="6355080"/>
-            <a:ext cx="10817352" cy="274320"/>
+            <a:off x="685800" y="6583680"/>
+            <a:ext cx="6490411" cy="256032"/>
           </a:xfrm>
           <a:prstGeom prst="rect">
             <a:avLst/>
@@ -8399,7 +8782,7 @@
             <a:r>
               <a:rPr sz="700">
                 <a:solidFill>
-                  <a:srgbClr val="8CA0C3"/>
+                  <a:srgbClr val="A0B4D2"/>
                 </a:solidFill>
                 <a:latin typeface="Consolas"/>
               </a:rPr>
@@ -8823,7 +9206,7 @@
             <a:avLst/>
           </a:prstGeom>
           <a:solidFill>
-            <a:srgbClr val="EDEDF3"/>
+            <a:srgbClr val="1F2C56"/>
           </a:solidFill>
           <a:ln>
             <a:noFill/>
@@ -8853,57 +9236,14 @@
       </p:sp>
       <p:sp>
         <p:nvSpPr>
-          <p:cNvPr id="3" name="Rectangle 2"/>
-          <p:cNvSpPr/>
-          <p:nvPr/>
-        </p:nvSpPr>
-        <p:spPr>
-          <a:xfrm>
-            <a:off x="0" y="0"/>
-            <a:ext cx="12188952" cy="50292"/>
-          </a:xfrm>
-          <a:prstGeom prst="rect">
-            <a:avLst/>
-          </a:prstGeom>
-          <a:solidFill>
-            <a:srgbClr val="1F2C56"/>
-          </a:solidFill>
-          <a:ln>
-            <a:noFill/>
-          </a:ln>
-        </p:spPr>
-        <p:style>
-          <a:lnRef idx="1">
-            <a:schemeClr val="accent1"/>
-          </a:lnRef>
-          <a:fillRef idx="3">
-            <a:schemeClr val="accent1"/>
-          </a:fillRef>
-          <a:effectRef idx="2">
-            <a:schemeClr val="accent1"/>
-          </a:effectRef>
-          <a:fontRef idx="minor">
-            <a:schemeClr val="lt1"/>
-          </a:fontRef>
-        </p:style>
-        <p:txBody>
-          <a:bodyPr rtlCol="0" anchor="ctr"/>
-          <a:lstStyle/>
-          <a:p>
-            <a:pPr algn="ctr"/>
-          </a:p>
-        </p:txBody>
-      </p:sp>
-      <p:sp>
-        <p:nvSpPr>
-          <p:cNvPr id="4" name="TextBox 3"/>
+          <p:cNvPr id="3" name="TextBox 2"/>
           <p:cNvSpPr txBox="1"/>
           <p:nvPr/>
         </p:nvSpPr>
         <p:spPr>
           <a:xfrm>
-            <a:off x="685800" y="109728"/>
-            <a:ext cx="10817352" cy="228600"/>
+            <a:off x="685800" y="2377440"/>
+            <a:ext cx="10817352" cy="365760"/>
           </a:xfrm>
           <a:prstGeom prst="rect">
             <a:avLst/>
@@ -8918,70 +9258,27 @@
           <a:p>
             <a:pPr algn="l"/>
             <a:r>
-              <a:rPr sz="750">
-                <a:solidFill>
-                  <a:srgbClr val="78808C"/>
+              <a:rPr sz="1200">
+                <a:solidFill>
+                  <a:srgbClr val="D9C089"/>
                 </a:solidFill>
                 <a:latin typeface="Consolas"/>
               </a:rPr>
-              <a:t>TL09  ·  INHALT</a:t>
-            </a:r>
-          </a:p>
-        </p:txBody>
-      </p:sp>
-      <p:sp>
-        <p:nvSpPr>
-          <p:cNvPr id="5" name="Rectangle 4"/>
+              <a:t>ABSCHLUSS</a:t>
+            </a:r>
+          </a:p>
+        </p:txBody>
+      </p:sp>
+      <p:sp>
+        <p:nvSpPr>
+          <p:cNvPr id="4" name="Rectangle 3"/>
           <p:cNvSpPr/>
           <p:nvPr/>
         </p:nvSpPr>
         <p:spPr>
           <a:xfrm>
-            <a:off x="0" y="1234440"/>
-            <a:ext cx="12188952" cy="12700"/>
-          </a:xfrm>
-          <a:prstGeom prst="rect">
-            <a:avLst/>
-          </a:prstGeom>
-          <a:solidFill>
-            <a:srgbClr val="D8DFE4"/>
-          </a:solidFill>
-          <a:ln>
-            <a:noFill/>
-          </a:ln>
-        </p:spPr>
-        <p:style>
-          <a:lnRef idx="1">
-            <a:schemeClr val="accent1"/>
-          </a:lnRef>
-          <a:fillRef idx="3">
-            <a:schemeClr val="accent1"/>
-          </a:fillRef>
-          <a:effectRef idx="2">
-            <a:schemeClr val="accent1"/>
-          </a:effectRef>
-          <a:fontRef idx="minor">
-            <a:schemeClr val="lt1"/>
-          </a:fontRef>
-        </p:style>
-        <p:txBody>
-          <a:bodyPr rtlCol="0" anchor="ctr"/>
-          <a:lstStyle/>
-          <a:p>
-            <a:pPr algn="ctr"/>
-          </a:p>
-        </p:txBody>
-      </p:sp>
-      <p:sp>
-        <p:nvSpPr>
-          <p:cNvPr id="6" name="Rectangle 5"/>
-          <p:cNvSpPr/>
-          <p:nvPr/>
-        </p:nvSpPr>
-        <p:spPr>
-          <a:xfrm>
-            <a:off x="685800" y="502920"/>
-            <a:ext cx="36576" cy="658368"/>
+            <a:off x="685800" y="2788920"/>
+            <a:ext cx="548640" cy="38100"/>
           </a:xfrm>
           <a:prstGeom prst="rect">
             <a:avLst/>
@@ -9017,14 +9314,14 @@
       </p:sp>
       <p:sp>
         <p:nvSpPr>
-          <p:cNvPr id="7" name="TextBox 6"/>
+          <p:cNvPr id="5" name="TextBox 4"/>
           <p:cNvSpPr txBox="1"/>
           <p:nvPr/>
         </p:nvSpPr>
         <p:spPr>
           <a:xfrm>
-            <a:off x="813816" y="502920"/>
-            <a:ext cx="10634472" cy="685800"/>
+            <a:off x="685800" y="3017520"/>
+            <a:ext cx="10817352" cy="1463040"/>
           </a:xfrm>
           <a:prstGeom prst="rect">
             <a:avLst/>
@@ -9039,27 +9336,27 @@
           <a:p>
             <a:pPr algn="l"/>
             <a:r>
-              <a:rPr sz="2400" b="1" i="0">
-                <a:solidFill>
-                  <a:srgbClr val="1F2C56"/>
+              <a:rPr sz="4000" b="1" i="0">
+                <a:solidFill>
+                  <a:srgbClr val="FFFFFF"/>
                 </a:solidFill>
                 <a:latin typeface="Arial"/>
               </a:rPr>
-              <a:t>Drei Transferaufgaben für die nächsten vier Wochen</a:t>
-            </a:r>
-          </a:p>
-        </p:txBody>
-      </p:sp>
-      <p:sp>
-        <p:nvSpPr>
-          <p:cNvPr id="8" name="TextBox 7"/>
+              <a:t>Transfer: Drei Aufgaben, eine Verpflichtung</a:t>
+            </a:r>
+          </a:p>
+        </p:txBody>
+      </p:sp>
+      <p:sp>
+        <p:nvSpPr>
+          <p:cNvPr id="6" name="TextBox 5"/>
           <p:cNvSpPr txBox="1"/>
           <p:nvPr/>
         </p:nvSpPr>
         <p:spPr>
           <a:xfrm>
-            <a:off x="685800" y="1417320"/>
-            <a:ext cx="10817352" cy="4892040"/>
+            <a:off x="685800" y="4480560"/>
+            <a:ext cx="8653881" cy="1280160"/>
           </a:xfrm>
           <a:prstGeom prst="rect">
             <a:avLst/>
@@ -9067,122 +9364,34 @@
           <a:noFill/>
         </p:spPr>
         <p:txBody>
-          <a:bodyPr wrap="square" anchor="ctr">
+          <a:bodyPr wrap="square">
             <a:spAutoFit/>
           </a:bodyPr>
           <a:lstStyle/>
           <a:p>
-            <a:pPr marL="190500" indent="-190500">
-              <a:spcBef>
-                <a:spcPts val="400"/>
-              </a:spcBef>
-              <a:spcAft>
-                <a:spcPts val="200"/>
-              </a:spcAft>
-            </a:pPr>
-            <a:r>
-              <a:rPr sz="1300">
-                <a:solidFill>
-                  <a:srgbClr val="3D5466"/>
+            <a:pPr algn="l"/>
+            <a:r>
+              <a:rPr sz="1600" b="0" i="0">
+                <a:solidFill>
+                  <a:srgbClr val="C8D2E6"/>
                 </a:solidFill>
                 <a:latin typeface="Arial"/>
               </a:rPr>
-              <a:t>▸  1: Change-Diagnose – aktuelle Veränderung mit drei Modellen analysieren.</a:t>
-            </a:r>
-          </a:p>
-          <a:p>
-            <a:pPr marL="190500" indent="-190500">
-              <a:spcBef>
-                <a:spcPts val="400"/>
-              </a:spcBef>
-              <a:spcAft>
-                <a:spcPts val="200"/>
-              </a:spcAft>
-            </a:pPr>
-            <a:r>
-              <a:rPr sz="1300">
-                <a:solidFill>
-                  <a:srgbClr val="3D5466"/>
-                </a:solidFill>
-                <a:latin typeface="Arial"/>
-              </a:rPr>
-              <a:t>▸  2: Change-Story entwickeln und mit dem stärksten Widerstand testen.</a:t>
-            </a:r>
-          </a:p>
-          <a:p>
-            <a:pPr marL="190500" indent="-190500">
-              <a:spcBef>
-                <a:spcPts val="400"/>
-              </a:spcBef>
-              <a:spcAft>
-                <a:spcPts val="200"/>
-              </a:spcAft>
-            </a:pPr>
-            <a:r>
-              <a:rPr sz="1300">
-                <a:solidFill>
-                  <a:srgbClr val="3D5466"/>
-                </a:solidFill>
-                <a:latin typeface="Arial"/>
-              </a:rPr>
-              <a:t>▸  3: Meilensteinplan dem Meinungsführer als Work-in-Progress vorstellen.</a:t>
-            </a:r>
-          </a:p>
-        </p:txBody>
-      </p:sp>
-      <p:sp>
-        <p:nvSpPr>
-          <p:cNvPr id="9" name="Rectangle 8"/>
-          <p:cNvSpPr/>
-          <p:nvPr/>
-        </p:nvSpPr>
-        <p:spPr>
-          <a:xfrm>
-            <a:off x="0" y="6510528"/>
-            <a:ext cx="12188952" cy="347472"/>
-          </a:xfrm>
-          <a:prstGeom prst="rect">
-            <a:avLst/>
-          </a:prstGeom>
-          <a:solidFill>
-            <a:srgbClr val="0A1937"/>
-          </a:solidFill>
-          <a:ln>
-            <a:noFill/>
-          </a:ln>
-        </p:spPr>
-        <p:style>
-          <a:lnRef idx="1">
-            <a:schemeClr val="accent1"/>
-          </a:lnRef>
-          <a:fillRef idx="3">
-            <a:schemeClr val="accent1"/>
-          </a:fillRef>
-          <a:effectRef idx="2">
-            <a:schemeClr val="accent1"/>
-          </a:effectRef>
-          <a:fontRef idx="minor">
-            <a:schemeClr val="lt1"/>
-          </a:fontRef>
-        </p:style>
-        <p:txBody>
-          <a:bodyPr rtlCol="0" anchor="ctr"/>
-          <a:lstStyle/>
-          <a:p>
-            <a:pPr algn="ctr"/>
-          </a:p>
-        </p:txBody>
-      </p:sp>
-      <p:sp>
-        <p:nvSpPr>
-          <p:cNvPr id="10" name="TextBox 9"/>
+              <a:t>Selbstverpflichtung – Brücke TL10</a:t>
+            </a:r>
+          </a:p>
+        </p:txBody>
+      </p:sp>
+      <p:sp>
+        <p:nvSpPr>
+          <p:cNvPr id="7" name="TextBox 6"/>
           <p:cNvSpPr txBox="1"/>
           <p:nvPr/>
         </p:nvSpPr>
         <p:spPr>
           <a:xfrm>
-            <a:off x="685800" y="6583680"/>
-            <a:ext cx="6490411" cy="256032"/>
+            <a:off x="685800" y="6355080"/>
+            <a:ext cx="10817352" cy="274320"/>
           </a:xfrm>
           <a:prstGeom prst="rect">
             <a:avLst/>
@@ -9199,7 +9408,7 @@
             <a:r>
               <a:rPr sz="700">
                 <a:solidFill>
-                  <a:srgbClr val="A0B4D2"/>
+                  <a:srgbClr val="8CA0C3"/>
                 </a:solidFill>
                 <a:latin typeface="Consolas"/>
               </a:rPr>
@@ -9217,6 +9426,424 @@
 </file>
 
 <file path=ppt/slides/slide21.xml><?xml version="1.0" encoding="utf-8"?>
+<p:sld xmlns:a="http://schemas.openxmlformats.org/drawingml/2006/main" xmlns:p="http://schemas.openxmlformats.org/presentationml/2006/main" xmlns:r="http://schemas.openxmlformats.org/officeDocument/2006/relationships">
+  <p:cSld>
+    <p:spTree>
+      <p:nvGrpSpPr>
+        <p:cNvPr id="1" name=""/>
+        <p:cNvGrpSpPr/>
+        <p:nvPr/>
+      </p:nvGrpSpPr>
+      <p:grpSpPr/>
+      <p:sp>
+        <p:nvSpPr>
+          <p:cNvPr id="2" name="Rectangle 1"/>
+          <p:cNvSpPr/>
+          <p:nvPr/>
+        </p:nvSpPr>
+        <p:spPr>
+          <a:xfrm>
+            <a:off x="0" y="0"/>
+            <a:ext cx="12188952" cy="6858000"/>
+          </a:xfrm>
+          <a:prstGeom prst="rect">
+            <a:avLst/>
+          </a:prstGeom>
+          <a:solidFill>
+            <a:srgbClr val="EDEDF3"/>
+          </a:solidFill>
+          <a:ln>
+            <a:noFill/>
+          </a:ln>
+        </p:spPr>
+        <p:style>
+          <a:lnRef idx="1">
+            <a:schemeClr val="accent1"/>
+          </a:lnRef>
+          <a:fillRef idx="3">
+            <a:schemeClr val="accent1"/>
+          </a:fillRef>
+          <a:effectRef idx="2">
+            <a:schemeClr val="accent1"/>
+          </a:effectRef>
+          <a:fontRef idx="minor">
+            <a:schemeClr val="lt1"/>
+          </a:fontRef>
+        </p:style>
+        <p:txBody>
+          <a:bodyPr rtlCol="0" anchor="ctr"/>
+          <a:lstStyle/>
+          <a:p>
+            <a:pPr algn="ctr"/>
+          </a:p>
+        </p:txBody>
+      </p:sp>
+      <p:sp>
+        <p:nvSpPr>
+          <p:cNvPr id="3" name="Rectangle 2"/>
+          <p:cNvSpPr/>
+          <p:nvPr/>
+        </p:nvSpPr>
+        <p:spPr>
+          <a:xfrm>
+            <a:off x="0" y="0"/>
+            <a:ext cx="12188952" cy="50292"/>
+          </a:xfrm>
+          <a:prstGeom prst="rect">
+            <a:avLst/>
+          </a:prstGeom>
+          <a:solidFill>
+            <a:srgbClr val="1F2C56"/>
+          </a:solidFill>
+          <a:ln>
+            <a:noFill/>
+          </a:ln>
+        </p:spPr>
+        <p:style>
+          <a:lnRef idx="1">
+            <a:schemeClr val="accent1"/>
+          </a:lnRef>
+          <a:fillRef idx="3">
+            <a:schemeClr val="accent1"/>
+          </a:fillRef>
+          <a:effectRef idx="2">
+            <a:schemeClr val="accent1"/>
+          </a:effectRef>
+          <a:fontRef idx="minor">
+            <a:schemeClr val="lt1"/>
+          </a:fontRef>
+        </p:style>
+        <p:txBody>
+          <a:bodyPr rtlCol="0" anchor="ctr"/>
+          <a:lstStyle/>
+          <a:p>
+            <a:pPr algn="ctr"/>
+          </a:p>
+        </p:txBody>
+      </p:sp>
+      <p:sp>
+        <p:nvSpPr>
+          <p:cNvPr id="4" name="TextBox 3"/>
+          <p:cNvSpPr txBox="1"/>
+          <p:nvPr/>
+        </p:nvSpPr>
+        <p:spPr>
+          <a:xfrm>
+            <a:off x="685800" y="109728"/>
+            <a:ext cx="10817352" cy="228600"/>
+          </a:xfrm>
+          <a:prstGeom prst="rect">
+            <a:avLst/>
+          </a:prstGeom>
+          <a:noFill/>
+        </p:spPr>
+        <p:txBody>
+          <a:bodyPr wrap="none">
+            <a:spAutoFit/>
+          </a:bodyPr>
+          <a:lstStyle/>
+          <a:p>
+            <a:pPr algn="l"/>
+            <a:r>
+              <a:rPr sz="750">
+                <a:solidFill>
+                  <a:srgbClr val="78808C"/>
+                </a:solidFill>
+                <a:latin typeface="Consolas"/>
+              </a:rPr>
+              <a:t>TL09  ·  INHALT</a:t>
+            </a:r>
+          </a:p>
+        </p:txBody>
+      </p:sp>
+      <p:sp>
+        <p:nvSpPr>
+          <p:cNvPr id="5" name="Rectangle 4"/>
+          <p:cNvSpPr/>
+          <p:nvPr/>
+        </p:nvSpPr>
+        <p:spPr>
+          <a:xfrm>
+            <a:off x="0" y="1234440"/>
+            <a:ext cx="12188952" cy="12700"/>
+          </a:xfrm>
+          <a:prstGeom prst="rect">
+            <a:avLst/>
+          </a:prstGeom>
+          <a:solidFill>
+            <a:srgbClr val="D8DFE4"/>
+          </a:solidFill>
+          <a:ln>
+            <a:noFill/>
+          </a:ln>
+        </p:spPr>
+        <p:style>
+          <a:lnRef idx="1">
+            <a:schemeClr val="accent1"/>
+          </a:lnRef>
+          <a:fillRef idx="3">
+            <a:schemeClr val="accent1"/>
+          </a:fillRef>
+          <a:effectRef idx="2">
+            <a:schemeClr val="accent1"/>
+          </a:effectRef>
+          <a:fontRef idx="minor">
+            <a:schemeClr val="lt1"/>
+          </a:fontRef>
+        </p:style>
+        <p:txBody>
+          <a:bodyPr rtlCol="0" anchor="ctr"/>
+          <a:lstStyle/>
+          <a:p>
+            <a:pPr algn="ctr"/>
+          </a:p>
+        </p:txBody>
+      </p:sp>
+      <p:sp>
+        <p:nvSpPr>
+          <p:cNvPr id="6" name="Rectangle 5"/>
+          <p:cNvSpPr/>
+          <p:nvPr/>
+        </p:nvSpPr>
+        <p:spPr>
+          <a:xfrm>
+            <a:off x="685800" y="502920"/>
+            <a:ext cx="36576" cy="658368"/>
+          </a:xfrm>
+          <a:prstGeom prst="rect">
+            <a:avLst/>
+          </a:prstGeom>
+          <a:solidFill>
+            <a:srgbClr val="D9C089"/>
+          </a:solidFill>
+          <a:ln>
+            <a:noFill/>
+          </a:ln>
+        </p:spPr>
+        <p:style>
+          <a:lnRef idx="1">
+            <a:schemeClr val="accent1"/>
+          </a:lnRef>
+          <a:fillRef idx="3">
+            <a:schemeClr val="accent1"/>
+          </a:fillRef>
+          <a:effectRef idx="2">
+            <a:schemeClr val="accent1"/>
+          </a:effectRef>
+          <a:fontRef idx="minor">
+            <a:schemeClr val="lt1"/>
+          </a:fontRef>
+        </p:style>
+        <p:txBody>
+          <a:bodyPr rtlCol="0" anchor="ctr"/>
+          <a:lstStyle/>
+          <a:p>
+            <a:pPr algn="ctr"/>
+          </a:p>
+        </p:txBody>
+      </p:sp>
+      <p:sp>
+        <p:nvSpPr>
+          <p:cNvPr id="7" name="TextBox 6"/>
+          <p:cNvSpPr txBox="1"/>
+          <p:nvPr/>
+        </p:nvSpPr>
+        <p:spPr>
+          <a:xfrm>
+            <a:off x="813816" y="502920"/>
+            <a:ext cx="10634472" cy="685800"/>
+          </a:xfrm>
+          <a:prstGeom prst="rect">
+            <a:avLst/>
+          </a:prstGeom>
+          <a:noFill/>
+        </p:spPr>
+        <p:txBody>
+          <a:bodyPr wrap="square">
+            <a:spAutoFit/>
+          </a:bodyPr>
+          <a:lstStyle/>
+          <a:p>
+            <a:pPr algn="l"/>
+            <a:r>
+              <a:rPr sz="2400" b="1" i="0">
+                <a:solidFill>
+                  <a:srgbClr val="1F2C56"/>
+                </a:solidFill>
+                <a:latin typeface="Arial"/>
+              </a:rPr>
+              <a:t>Drei Transferaufgaben für die nächsten vier Wochen</a:t>
+            </a:r>
+          </a:p>
+        </p:txBody>
+      </p:sp>
+      <p:sp>
+        <p:nvSpPr>
+          <p:cNvPr id="8" name="TextBox 7"/>
+          <p:cNvSpPr txBox="1"/>
+          <p:nvPr/>
+        </p:nvSpPr>
+        <p:spPr>
+          <a:xfrm>
+            <a:off x="685800" y="1417320"/>
+            <a:ext cx="10817352" cy="4892040"/>
+          </a:xfrm>
+          <a:prstGeom prst="rect">
+            <a:avLst/>
+          </a:prstGeom>
+          <a:noFill/>
+        </p:spPr>
+        <p:txBody>
+          <a:bodyPr wrap="square" anchor="ctr">
+            <a:spAutoFit/>
+          </a:bodyPr>
+          <a:lstStyle/>
+          <a:p>
+            <a:pPr marL="190500" indent="-190500">
+              <a:spcBef>
+                <a:spcPts val="400"/>
+              </a:spcBef>
+              <a:spcAft>
+                <a:spcPts val="200"/>
+              </a:spcAft>
+            </a:pPr>
+            <a:r>
+              <a:rPr sz="1300">
+                <a:solidFill>
+                  <a:srgbClr val="3D5466"/>
+                </a:solidFill>
+                <a:latin typeface="Arial"/>
+              </a:rPr>
+              <a:t>▸  1: Change-Diagnose – aktuelle Veränderung mit drei Modellen analysieren.</a:t>
+            </a:r>
+          </a:p>
+          <a:p>
+            <a:pPr marL="190500" indent="-190500">
+              <a:spcBef>
+                <a:spcPts val="400"/>
+              </a:spcBef>
+              <a:spcAft>
+                <a:spcPts val="200"/>
+              </a:spcAft>
+            </a:pPr>
+            <a:r>
+              <a:rPr sz="1300">
+                <a:solidFill>
+                  <a:srgbClr val="3D5466"/>
+                </a:solidFill>
+                <a:latin typeface="Arial"/>
+              </a:rPr>
+              <a:t>▸  2: Change-Story entwickeln und mit dem stärksten Widerstand testen.</a:t>
+            </a:r>
+          </a:p>
+          <a:p>
+            <a:pPr marL="190500" indent="-190500">
+              <a:spcBef>
+                <a:spcPts val="400"/>
+              </a:spcBef>
+              <a:spcAft>
+                <a:spcPts val="200"/>
+              </a:spcAft>
+            </a:pPr>
+            <a:r>
+              <a:rPr sz="1300">
+                <a:solidFill>
+                  <a:srgbClr val="3D5466"/>
+                </a:solidFill>
+                <a:latin typeface="Arial"/>
+              </a:rPr>
+              <a:t>▸  3: Meilensteinplan dem Meinungsführer als Work-in-Progress vorstellen.</a:t>
+            </a:r>
+          </a:p>
+        </p:txBody>
+      </p:sp>
+      <p:sp>
+        <p:nvSpPr>
+          <p:cNvPr id="9" name="Rectangle 8"/>
+          <p:cNvSpPr/>
+          <p:nvPr/>
+        </p:nvSpPr>
+        <p:spPr>
+          <a:xfrm>
+            <a:off x="0" y="6510528"/>
+            <a:ext cx="12188952" cy="347472"/>
+          </a:xfrm>
+          <a:prstGeom prst="rect">
+            <a:avLst/>
+          </a:prstGeom>
+          <a:solidFill>
+            <a:srgbClr val="0A1937"/>
+          </a:solidFill>
+          <a:ln>
+            <a:noFill/>
+          </a:ln>
+        </p:spPr>
+        <p:style>
+          <a:lnRef idx="1">
+            <a:schemeClr val="accent1"/>
+          </a:lnRef>
+          <a:fillRef idx="3">
+            <a:schemeClr val="accent1"/>
+          </a:fillRef>
+          <a:effectRef idx="2">
+            <a:schemeClr val="accent1"/>
+          </a:effectRef>
+          <a:fontRef idx="minor">
+            <a:schemeClr val="lt1"/>
+          </a:fontRef>
+        </p:style>
+        <p:txBody>
+          <a:bodyPr rtlCol="0" anchor="ctr"/>
+          <a:lstStyle/>
+          <a:p>
+            <a:pPr algn="ctr"/>
+          </a:p>
+        </p:txBody>
+      </p:sp>
+      <p:sp>
+        <p:nvSpPr>
+          <p:cNvPr id="10" name="TextBox 9"/>
+          <p:cNvSpPr txBox="1"/>
+          <p:nvPr/>
+        </p:nvSpPr>
+        <p:spPr>
+          <a:xfrm>
+            <a:off x="685800" y="6583680"/>
+            <a:ext cx="6490411" cy="256032"/>
+          </a:xfrm>
+          <a:prstGeom prst="rect">
+            <a:avLst/>
+          </a:prstGeom>
+          <a:noFill/>
+        </p:spPr>
+        <p:txBody>
+          <a:bodyPr wrap="none">
+            <a:spAutoFit/>
+          </a:bodyPr>
+          <a:lstStyle/>
+          <a:p>
+            <a:pPr algn="l"/>
+            <a:r>
+              <a:rPr sz="700">
+                <a:solidFill>
+                  <a:srgbClr val="A0B4D2"/>
+                </a:solidFill>
+                <a:latin typeface="Consolas"/>
+              </a:rPr>
+              <a:t>FKB Campus  ·  TL09</a:t>
+            </a:r>
+          </a:p>
+        </p:txBody>
+      </p:sp>
+    </p:spTree>
+  </p:cSld>
+  <p:clrMapOvr>
+    <a:masterClrMapping/>
+  </p:clrMapOvr>
+</p:sld>
+</file>
+
+<file path=ppt/slides/slide22.xml><?xml version="1.0" encoding="utf-8"?>
 <p:sld xmlns:a="http://schemas.openxmlformats.org/drawingml/2006/main" xmlns:p="http://schemas.openxmlformats.org/presentationml/2006/main" xmlns:r="http://schemas.openxmlformats.org/officeDocument/2006/relationships">
   <p:cSld>
     <p:spTree>
